--- a/examples/recreations/15_Dropbox_Family__picturesForPuttingAwayClothes/out_mat2ppt.pptx
+++ b/examples/recreations/15_Dropbox_Family__picturesForPuttingAwayClothes/out_mat2ppt.pptx
@@ -3325,7 +3325,7 @@
       </p:pic>
       <p:pic>
         <p:nvPicPr>
-          <p:cNvPr id="4" name="Picture 3" descr="image10.jpg"/>
+          <p:cNvPr id="4" name="Picture 3" descr="image9.gif"/>
           <p:cNvPicPr>
             <a:picLocks noChangeAspect="1"/>
           </p:cNvPicPr>
@@ -3333,6 +3333,128 @@
         </p:nvPicPr>
         <p:blipFill>
           <a:blip r:embed="rId4"/>
+          <a:stretch>
+            <a:fillRect/>
+          </a:stretch>
+        </p:blipFill>
+        <p:spPr>
+          <a:xfrm>
+            <a:off x="5036619" y="452927"/>
+            <a:ext cx="3337175" cy="4000873"/>
+          </a:xfrm>
+          <a:prstGeom prst="rect">
+            <a:avLst/>
+          </a:prstGeom>
+        </p:spPr>
+      </p:pic>
+      <p:sp>
+        <p:nvSpPr>
+          <p:cNvPr id="5" name="Rounded Rectangle 4"/>
+          <p:cNvSpPr/>
+          <p:nvPr/>
+        </p:nvSpPr>
+        <p:spPr>
+          <a:xfrm>
+            <a:off x="5589036" y="2379306"/>
+            <a:ext cx="2323323" cy="2074494"/>
+          </a:xfrm>
+          <a:prstGeom prst="roundRect">
+            <a:avLst/>
+          </a:prstGeom>
+        </p:spPr>
+        <p:style>
+          <a:lnRef idx="1">
+            <a:schemeClr val="accent1"/>
+          </a:lnRef>
+          <a:fillRef idx="3">
+            <a:schemeClr val="accent1"/>
+          </a:fillRef>
+          <a:effectRef idx="2">
+            <a:schemeClr val="accent1"/>
+          </a:effectRef>
+          <a:fontRef idx="minor">
+            <a:schemeClr val="lt1"/>
+          </a:fontRef>
+        </p:style>
+        <p:txBody>
+          <a:bodyPr rtlCol="0" anchor="ctr"/>
+          <a:lstStyle/>
+          <a:p>
+            <a:pPr algn="ctr"/>
+          </a:p>
+        </p:txBody>
+      </p:sp>
+      <p:pic>
+        <p:nvPicPr>
+          <p:cNvPr id="6" name="Picture 5" descr="image9.gif"/>
+          <p:cNvPicPr>
+            <a:picLocks noChangeAspect="1"/>
+          </p:cNvPicPr>
+          <p:nvPr/>
+        </p:nvPicPr>
+        <p:blipFill>
+          <a:blip r:embed="rId5"/>
+          <a:stretch>
+            <a:fillRect/>
+          </a:stretch>
+        </p:blipFill>
+        <p:spPr>
+          <a:xfrm>
+            <a:off x="8725256" y="452928"/>
+            <a:ext cx="3337175" cy="4000873"/>
+          </a:xfrm>
+          <a:prstGeom prst="rect">
+            <a:avLst/>
+          </a:prstGeom>
+        </p:spPr>
+      </p:pic>
+      <p:sp>
+        <p:nvSpPr>
+          <p:cNvPr id="7" name="Rounded Rectangle 6"/>
+          <p:cNvSpPr/>
+          <p:nvPr/>
+        </p:nvSpPr>
+        <p:spPr>
+          <a:xfrm>
+            <a:off x="8819128" y="452927"/>
+            <a:ext cx="3142718" cy="1926380"/>
+          </a:xfrm>
+          <a:prstGeom prst="roundRect">
+            <a:avLst/>
+          </a:prstGeom>
+        </p:spPr>
+        <p:style>
+          <a:lnRef idx="1">
+            <a:schemeClr val="accent1"/>
+          </a:lnRef>
+          <a:fillRef idx="3">
+            <a:schemeClr val="accent1"/>
+          </a:fillRef>
+          <a:effectRef idx="2">
+            <a:schemeClr val="accent1"/>
+          </a:effectRef>
+          <a:fontRef idx="minor">
+            <a:schemeClr val="lt1"/>
+          </a:fontRef>
+        </p:style>
+        <p:txBody>
+          <a:bodyPr rtlCol="0" anchor="ctr"/>
+          <a:lstStyle/>
+          <a:p>
+            <a:pPr algn="ctr"/>
+          </a:p>
+        </p:txBody>
+      </p:sp>
+      <p:pic>
+        <p:nvPicPr>
+          <p:cNvPr id="8" name="Picture 7" descr="image10.jpg"/>
+          <p:cNvPicPr>
+            <a:picLocks noChangeAspect="1"/>
+          </p:cNvPicPr>
+          <p:nvPr/>
+        </p:nvPicPr>
+        <p:blipFill>
+          <a:blip r:embed="rId6"/>
           <a:stretch>
             <a:fillRect/>
           </a:stretch>

--- a/examples/recreations/15_Dropbox_Family__picturesForPuttingAwayClothes/out_mat2ppt.pptx
+++ b/examples/recreations/15_Dropbox_Family__picturesForPuttingAwayClothes/out_mat2ppt.pptx
@@ -1,20 +1,20 @@
 
 <file path=ppt/presentation.xml><?xml version="1.0" encoding="utf-8"?>
-<p:presentation xmlns:a="http://schemas.openxmlformats.org/drawingml/2006/main" xmlns:r="http://schemas.openxmlformats.org/officeDocument/2006/relationships" xmlns:p="http://schemas.openxmlformats.org/presentationml/2006/main" saveSubsetFonts="1" autoCompressPictures="0">
+<p:presentation xmlns:a="http://schemas.openxmlformats.org/drawingml/2006/main" xmlns:r="http://schemas.openxmlformats.org/officeDocument/2006/relationships" xmlns:p="http://schemas.openxmlformats.org/presentationml/2006/main" saveSubsetFonts="1">
   <p:sldMasterIdLst>
     <p:sldMasterId id="2147483648" r:id="rId1"/>
   </p:sldMasterIdLst>
   <p:sldIdLst>
-    <p:sldId id="256" r:id="rId7"/>
-    <p:sldId id="257" r:id="rId8"/>
+    <p:sldId id="256" r:id="rId8"/>
+    <p:sldId id="257" r:id="rId9"/>
   </p:sldIdLst>
-  <p:sldSz cx="12192000" cy="6858000" type="screen4x3"/>
-  <p:notesSz cx="6858000" cy="9144000"/>
+  <p:sldSz cx="12192000" cy="6858000"/>
+  <p:notesSz cx="6950075" cy="9236075"/>
   <p:defaultTextStyle>
     <a:defPPr>
       <a:defRPr lang="en-US"/>
     </a:defPPr>
-    <a:lvl1pPr marL="0" algn="l" defTabSz="457200" rtl="0" eaLnBrk="1" latinLnBrk="0" hangingPunct="1">
+    <a:lvl1pPr marL="0" algn="l" defTabSz="914400" rtl="0" eaLnBrk="1" latinLnBrk="0" hangingPunct="1">
       <a:defRPr sz="1800" kern="1200">
         <a:solidFill>
           <a:schemeClr val="tx1"/>
@@ -24,7 +24,7 @@
         <a:cs typeface="+mn-cs"/>
       </a:defRPr>
     </a:lvl1pPr>
-    <a:lvl2pPr marL="457200" algn="l" defTabSz="457200" rtl="0" eaLnBrk="1" latinLnBrk="0" hangingPunct="1">
+    <a:lvl2pPr marL="457200" algn="l" defTabSz="914400" rtl="0" eaLnBrk="1" latinLnBrk="0" hangingPunct="1">
       <a:defRPr sz="1800" kern="1200">
         <a:solidFill>
           <a:schemeClr val="tx1"/>
@@ -34,7 +34,7 @@
         <a:cs typeface="+mn-cs"/>
       </a:defRPr>
     </a:lvl2pPr>
-    <a:lvl3pPr marL="914400" algn="l" defTabSz="457200" rtl="0" eaLnBrk="1" latinLnBrk="0" hangingPunct="1">
+    <a:lvl3pPr marL="914400" algn="l" defTabSz="914400" rtl="0" eaLnBrk="1" latinLnBrk="0" hangingPunct="1">
       <a:defRPr sz="1800" kern="1200">
         <a:solidFill>
           <a:schemeClr val="tx1"/>
@@ -44,7 +44,7 @@
         <a:cs typeface="+mn-cs"/>
       </a:defRPr>
     </a:lvl3pPr>
-    <a:lvl4pPr marL="1371600" algn="l" defTabSz="457200" rtl="0" eaLnBrk="1" latinLnBrk="0" hangingPunct="1">
+    <a:lvl4pPr marL="1371600" algn="l" defTabSz="914400" rtl="0" eaLnBrk="1" latinLnBrk="0" hangingPunct="1">
       <a:defRPr sz="1800" kern="1200">
         <a:solidFill>
           <a:schemeClr val="tx1"/>
@@ -54,7 +54,7 @@
         <a:cs typeface="+mn-cs"/>
       </a:defRPr>
     </a:lvl4pPr>
-    <a:lvl5pPr marL="1828800" algn="l" defTabSz="457200" rtl="0" eaLnBrk="1" latinLnBrk="0" hangingPunct="1">
+    <a:lvl5pPr marL="1828800" algn="l" defTabSz="914400" rtl="0" eaLnBrk="1" latinLnBrk="0" hangingPunct="1">
       <a:defRPr sz="1800" kern="1200">
         <a:solidFill>
           <a:schemeClr val="tx1"/>
@@ -64,7 +64,7 @@
         <a:cs typeface="+mn-cs"/>
       </a:defRPr>
     </a:lvl5pPr>
-    <a:lvl6pPr marL="2286000" algn="l" defTabSz="457200" rtl="0" eaLnBrk="1" latinLnBrk="0" hangingPunct="1">
+    <a:lvl6pPr marL="2286000" algn="l" defTabSz="914400" rtl="0" eaLnBrk="1" latinLnBrk="0" hangingPunct="1">
       <a:defRPr sz="1800" kern="1200">
         <a:solidFill>
           <a:schemeClr val="tx1"/>
@@ -74,7 +74,7 @@
         <a:cs typeface="+mn-cs"/>
       </a:defRPr>
     </a:lvl6pPr>
-    <a:lvl7pPr marL="2743200" algn="l" defTabSz="457200" rtl="0" eaLnBrk="1" latinLnBrk="0" hangingPunct="1">
+    <a:lvl7pPr marL="2743200" algn="l" defTabSz="914400" rtl="0" eaLnBrk="1" latinLnBrk="0" hangingPunct="1">
       <a:defRPr sz="1800" kern="1200">
         <a:solidFill>
           <a:schemeClr val="tx1"/>
@@ -84,7 +84,7 @@
         <a:cs typeface="+mn-cs"/>
       </a:defRPr>
     </a:lvl7pPr>
-    <a:lvl8pPr marL="3200400" algn="l" defTabSz="457200" rtl="0" eaLnBrk="1" latinLnBrk="0" hangingPunct="1">
+    <a:lvl8pPr marL="3200400" algn="l" defTabSz="914400" rtl="0" eaLnBrk="1" latinLnBrk="0" hangingPunct="1">
       <a:defRPr sz="1800" kern="1200">
         <a:solidFill>
           <a:schemeClr val="tx1"/>
@@ -94,7 +94,7 @@
         <a:cs typeface="+mn-cs"/>
       </a:defRPr>
     </a:lvl8pPr>
-    <a:lvl9pPr marL="3657600" algn="l" defTabSz="457200" rtl="0" eaLnBrk="1" latinLnBrk="0" hangingPunct="1">
+    <a:lvl9pPr marL="3657600" algn="l" defTabSz="914400" rtl="0" eaLnBrk="1" latinLnBrk="0" hangingPunct="1">
       <a:defRPr sz="1800" kern="1200">
         <a:solidFill>
           <a:schemeClr val="tx1"/>
@@ -105,6 +105,11 @@
       </a:defRPr>
     </a:lvl9pPr>
   </p:defaultTextStyle>
+  <p:extLst>
+    <p:ext uri="{EFAFB233-063F-42B5-8137-9DF3F51BA10A}">
+      <p15:sldGuideLst xmlns:p15="http://schemas.microsoft.com/office/powerpoint/2012/main"/>
+    </p:ext>
+  </p:extLst>
 </p:presentation>
 </file>
 
@@ -127,7 +132,13 @@
       </p:grpSpPr>
       <p:sp>
         <p:nvSpPr>
-          <p:cNvPr id="2" name="Title 1"/>
+          <p:cNvPr id="2" name="Title 1">
+            <a:extLst>
+              <a:ext uri="{FF2B5EF4-FFF2-40B4-BE49-F238E27FC236}">
+                <a16:creationId xmlns:a16="http://schemas.microsoft.com/office/drawing/2014/main" id="{E0BEBB35-5FE2-4899-B7D8-594531009384}"/>
+              </a:ext>
+            </a:extLst>
+          </p:cNvPr>
           <p:cNvSpPr>
             <a:spLocks noGrp="1"/>
           </p:cNvSpPr>
@@ -137,25 +148,34 @@
         </p:nvSpPr>
         <p:spPr>
           <a:xfrm>
-            <a:off x="685800" y="2130425"/>
-            <a:ext cx="7772400" cy="1470025"/>
+            <a:off x="1524000" y="1122363"/>
+            <a:ext cx="9144000" cy="2387600"/>
           </a:xfrm>
         </p:spPr>
         <p:txBody>
-          <a:bodyPr/>
-          <a:lstStyle/>
-          <a:p>
-            <a:r>
-              <a:rPr lang="en-US" smtClean="0"/>
+          <a:bodyPr anchor="b"/>
+          <a:lstStyle>
+            <a:lvl1pPr algn="ctr">
+              <a:defRPr sz="6000"/>
+            </a:lvl1pPr>
+          </a:lstStyle>
+          <a:p>
+            <a:r>
+              <a:rPr lang="en-US"/>
               <a:t>Click to edit Master title style</a:t>
             </a:r>
-            <a:endParaRPr lang="en-US"/>
-          </a:p>
-        </p:txBody>
-      </p:sp>
-      <p:sp>
-        <p:nvSpPr>
-          <p:cNvPr id="3" name="Subtitle 2"/>
+          </a:p>
+        </p:txBody>
+      </p:sp>
+      <p:sp>
+        <p:nvSpPr>
+          <p:cNvPr id="3" name="Subtitle 2">
+            <a:extLst>
+              <a:ext uri="{FF2B5EF4-FFF2-40B4-BE49-F238E27FC236}">
+                <a16:creationId xmlns:a16="http://schemas.microsoft.com/office/drawing/2014/main" id="{C33C6DF7-8C35-4697-8422-B07FE3E34D7C}"/>
+              </a:ext>
+            </a:extLst>
+          </p:cNvPr>
           <p:cNvSpPr>
             <a:spLocks noGrp="1"/>
           </p:cNvSpPr>
@@ -165,8 +185,8 @@
         </p:nvSpPr>
         <p:spPr>
           <a:xfrm>
-            <a:off x="1371600" y="3886200"/>
-            <a:ext cx="6400800" cy="1752600"/>
+            <a:off x="1524000" y="3602038"/>
+            <a:ext cx="9144000" cy="1655762"/>
           </a:xfrm>
         </p:spPr>
         <p:txBody>
@@ -174,122 +194,73 @@
           <a:lstStyle>
             <a:lvl1pPr marL="0" indent="0" algn="ctr">
               <a:buNone/>
-              <a:defRPr>
-                <a:solidFill>
-                  <a:schemeClr val="tx1">
-                    <a:tint val="75000"/>
-                  </a:schemeClr>
-                </a:solidFill>
-              </a:defRPr>
+              <a:defRPr sz="2400"/>
             </a:lvl1pPr>
             <a:lvl2pPr marL="457200" indent="0" algn="ctr">
               <a:buNone/>
-              <a:defRPr>
-                <a:solidFill>
-                  <a:schemeClr val="tx1">
-                    <a:tint val="75000"/>
-                  </a:schemeClr>
-                </a:solidFill>
-              </a:defRPr>
+              <a:defRPr sz="2000"/>
             </a:lvl2pPr>
             <a:lvl3pPr marL="914400" indent="0" algn="ctr">
               <a:buNone/>
-              <a:defRPr>
-                <a:solidFill>
-                  <a:schemeClr val="tx1">
-                    <a:tint val="75000"/>
-                  </a:schemeClr>
-                </a:solidFill>
-              </a:defRPr>
+              <a:defRPr sz="1800"/>
             </a:lvl3pPr>
             <a:lvl4pPr marL="1371600" indent="0" algn="ctr">
               <a:buNone/>
-              <a:defRPr>
-                <a:solidFill>
-                  <a:schemeClr val="tx1">
-                    <a:tint val="75000"/>
-                  </a:schemeClr>
-                </a:solidFill>
-              </a:defRPr>
+              <a:defRPr sz="1600"/>
             </a:lvl4pPr>
             <a:lvl5pPr marL="1828800" indent="0" algn="ctr">
               <a:buNone/>
-              <a:defRPr>
-                <a:solidFill>
-                  <a:schemeClr val="tx1">
-                    <a:tint val="75000"/>
-                  </a:schemeClr>
-                </a:solidFill>
-              </a:defRPr>
+              <a:defRPr sz="1600"/>
             </a:lvl5pPr>
             <a:lvl6pPr marL="2286000" indent="0" algn="ctr">
               <a:buNone/>
-              <a:defRPr>
-                <a:solidFill>
-                  <a:schemeClr val="tx1">
-                    <a:tint val="75000"/>
-                  </a:schemeClr>
-                </a:solidFill>
-              </a:defRPr>
+              <a:defRPr sz="1600"/>
             </a:lvl6pPr>
             <a:lvl7pPr marL="2743200" indent="0" algn="ctr">
               <a:buNone/>
-              <a:defRPr>
-                <a:solidFill>
-                  <a:schemeClr val="tx1">
-                    <a:tint val="75000"/>
-                  </a:schemeClr>
-                </a:solidFill>
-              </a:defRPr>
+              <a:defRPr sz="1600"/>
             </a:lvl7pPr>
             <a:lvl8pPr marL="3200400" indent="0" algn="ctr">
               <a:buNone/>
-              <a:defRPr>
-                <a:solidFill>
-                  <a:schemeClr val="tx1">
-                    <a:tint val="75000"/>
-                  </a:schemeClr>
-                </a:solidFill>
-              </a:defRPr>
+              <a:defRPr sz="1600"/>
             </a:lvl8pPr>
             <a:lvl9pPr marL="3657600" indent="0" algn="ctr">
               <a:buNone/>
-              <a:defRPr>
-                <a:solidFill>
-                  <a:schemeClr val="tx1">
-                    <a:tint val="75000"/>
-                  </a:schemeClr>
-                </a:solidFill>
-              </a:defRPr>
+              <a:defRPr sz="1600"/>
             </a:lvl9pPr>
           </a:lstStyle>
           <a:p>
             <a:r>
+              <a:rPr lang="en-US"/>
+              <a:t>Click to edit Master subtitle style</a:t>
+            </a:r>
+          </a:p>
+        </p:txBody>
+      </p:sp>
+      <p:sp>
+        <p:nvSpPr>
+          <p:cNvPr id="4" name="Date Placeholder 3">
+            <a:extLst>
+              <a:ext uri="{FF2B5EF4-FFF2-40B4-BE49-F238E27FC236}">
+                <a16:creationId xmlns:a16="http://schemas.microsoft.com/office/drawing/2014/main" id="{58487F68-3DA6-477D-969C-E3DE9A404F88}"/>
+              </a:ext>
+            </a:extLst>
+          </p:cNvPr>
+          <p:cNvSpPr>
+            <a:spLocks noGrp="1"/>
+          </p:cNvSpPr>
+          <p:nvPr>
+            <p:ph type="dt" sz="half" idx="10"/>
+          </p:nvPr>
+        </p:nvSpPr>
+        <p:spPr/>
+        <p:txBody>
+          <a:bodyPr/>
+          <a:lstStyle/>
+          <a:p>
+            <a:fld id="{8D2841BB-5308-4CC0-808C-8C8DAAE974C9}" type="datetimeFigureOut">
               <a:rPr lang="en-US" smtClean="0"/>
-              <a:t>Click to edit Master subtitle style</a:t>
-            </a:r>
-            <a:endParaRPr lang="en-US"/>
-          </a:p>
-        </p:txBody>
-      </p:sp>
-      <p:sp>
-        <p:nvSpPr>
-          <p:cNvPr id="4" name="Date Placeholder 3"/>
-          <p:cNvSpPr>
-            <a:spLocks noGrp="1"/>
-          </p:cNvSpPr>
-          <p:nvPr>
-            <p:ph type="dt" sz="half" idx="10"/>
-          </p:nvPr>
-        </p:nvSpPr>
-        <p:spPr/>
-        <p:txBody>
-          <a:bodyPr/>
-          <a:lstStyle/>
-          <a:p>
-            <a:fld id="{5BCAD085-E8A6-8845-BD4E-CB4CCA059FC4}" type="datetimeFigureOut">
-              <a:rPr lang="en-US" smtClean="0"/>
-              <a:t>1/27/13</a:t>
+              <a:t>6/9/2018</a:t>
             </a:fld>
             <a:endParaRPr lang="en-US"/>
           </a:p>
@@ -297,7 +268,13 @@
       </p:sp>
       <p:sp>
         <p:nvSpPr>
-          <p:cNvPr id="5" name="Footer Placeholder 4"/>
+          <p:cNvPr id="5" name="Footer Placeholder 4">
+            <a:extLst>
+              <a:ext uri="{FF2B5EF4-FFF2-40B4-BE49-F238E27FC236}">
+                <a16:creationId xmlns:a16="http://schemas.microsoft.com/office/drawing/2014/main" id="{3F589311-268A-4844-A5F5-8F339C659613}"/>
+              </a:ext>
+            </a:extLst>
+          </p:cNvPr>
           <p:cNvSpPr>
             <a:spLocks noGrp="1"/>
           </p:cNvSpPr>
@@ -316,7 +293,13 @@
       </p:sp>
       <p:sp>
         <p:nvSpPr>
-          <p:cNvPr id="6" name="Slide Number Placeholder 5"/>
+          <p:cNvPr id="6" name="Slide Number Placeholder 5">
+            <a:extLst>
+              <a:ext uri="{FF2B5EF4-FFF2-40B4-BE49-F238E27FC236}">
+                <a16:creationId xmlns:a16="http://schemas.microsoft.com/office/drawing/2014/main" id="{F0326D14-1BF1-4A4C-9456-40D9721F9BE3}"/>
+              </a:ext>
+            </a:extLst>
+          </p:cNvPr>
           <p:cNvSpPr>
             <a:spLocks noGrp="1"/>
           </p:cNvSpPr>
@@ -329,7 +312,7 @@
           <a:bodyPr/>
           <a:lstStyle/>
           <a:p>
-            <a:fld id="{C1FF6DA9-008F-8B48-92A6-B652298478BF}" type="slidenum">
+            <a:fld id="{FAF9E467-DE96-4CC8-9A85-14AC8D026622}" type="slidenum">
               <a:rPr lang="en-US" smtClean="0"/>
               <a:t>‹#›</a:t>
             </a:fld>
@@ -340,7 +323,7 @@
     </p:spTree>
     <p:extLst>
       <p:ext uri="{BB962C8B-B14F-4D97-AF65-F5344CB8AC3E}">
-        <p14:creationId xmlns:p14="http://schemas.microsoft.com/office/powerpoint/2010/main" val="3168075583"/>
+        <p14:creationId xmlns:p14="http://schemas.microsoft.com/office/powerpoint/2010/main" val="1088041203"/>
       </p:ext>
     </p:extLst>
   </p:cSld>
@@ -369,7 +352,13 @@
       </p:grpSpPr>
       <p:sp>
         <p:nvSpPr>
-          <p:cNvPr id="2" name="Title 1"/>
+          <p:cNvPr id="2" name="Title 1">
+            <a:extLst>
+              <a:ext uri="{FF2B5EF4-FFF2-40B4-BE49-F238E27FC236}">
+                <a16:creationId xmlns:a16="http://schemas.microsoft.com/office/drawing/2014/main" id="{52624E3F-22E0-4191-A26E-56AECB265E10}"/>
+              </a:ext>
+            </a:extLst>
+          </p:cNvPr>
           <p:cNvSpPr>
             <a:spLocks noGrp="1"/>
           </p:cNvSpPr>
@@ -383,83 +372,93 @@
           <a:lstStyle/>
           <a:p>
             <a:r>
+              <a:rPr lang="en-US"/>
+              <a:t>Click to edit Master title style</a:t>
+            </a:r>
+          </a:p>
+        </p:txBody>
+      </p:sp>
+      <p:sp>
+        <p:nvSpPr>
+          <p:cNvPr id="3" name="Vertical Text Placeholder 2">
+            <a:extLst>
+              <a:ext uri="{FF2B5EF4-FFF2-40B4-BE49-F238E27FC236}">
+                <a16:creationId xmlns:a16="http://schemas.microsoft.com/office/drawing/2014/main" id="{593CB64F-EBDA-4319-9C10-C722DDA4EEA1}"/>
+              </a:ext>
+            </a:extLst>
+          </p:cNvPr>
+          <p:cNvSpPr>
+            <a:spLocks noGrp="1"/>
+          </p:cNvSpPr>
+          <p:nvPr>
+            <p:ph type="body" orient="vert" idx="1"/>
+          </p:nvPr>
+        </p:nvSpPr>
+        <p:spPr/>
+        <p:txBody>
+          <a:bodyPr vert="eaVert"/>
+          <a:lstStyle/>
+          <a:p>
+            <a:pPr lvl="0"/>
+            <a:r>
+              <a:rPr lang="en-US"/>
+              <a:t>Edit Master text styles</a:t>
+            </a:r>
+          </a:p>
+          <a:p>
+            <a:pPr lvl="1"/>
+            <a:r>
+              <a:rPr lang="en-US"/>
+              <a:t>Second level</a:t>
+            </a:r>
+          </a:p>
+          <a:p>
+            <a:pPr lvl="2"/>
+            <a:r>
+              <a:rPr lang="en-US"/>
+              <a:t>Third level</a:t>
+            </a:r>
+          </a:p>
+          <a:p>
+            <a:pPr lvl="3"/>
+            <a:r>
+              <a:rPr lang="en-US"/>
+              <a:t>Fourth level</a:t>
+            </a:r>
+          </a:p>
+          <a:p>
+            <a:pPr lvl="4"/>
+            <a:r>
+              <a:rPr lang="en-US"/>
+              <a:t>Fifth level</a:t>
+            </a:r>
+          </a:p>
+        </p:txBody>
+      </p:sp>
+      <p:sp>
+        <p:nvSpPr>
+          <p:cNvPr id="4" name="Date Placeholder 3">
+            <a:extLst>
+              <a:ext uri="{FF2B5EF4-FFF2-40B4-BE49-F238E27FC236}">
+                <a16:creationId xmlns:a16="http://schemas.microsoft.com/office/drawing/2014/main" id="{341490A3-F7DB-405F-9F2E-F61A38FA536E}"/>
+              </a:ext>
+            </a:extLst>
+          </p:cNvPr>
+          <p:cNvSpPr>
+            <a:spLocks noGrp="1"/>
+          </p:cNvSpPr>
+          <p:nvPr>
+            <p:ph type="dt" sz="half" idx="10"/>
+          </p:nvPr>
+        </p:nvSpPr>
+        <p:spPr/>
+        <p:txBody>
+          <a:bodyPr/>
+          <a:lstStyle/>
+          <a:p>
+            <a:fld id="{8D2841BB-5308-4CC0-808C-8C8DAAE974C9}" type="datetimeFigureOut">
               <a:rPr lang="en-US" smtClean="0"/>
-              <a:t>Click to edit Master title style</a:t>
-            </a:r>
-            <a:endParaRPr lang="en-US"/>
-          </a:p>
-        </p:txBody>
-      </p:sp>
-      <p:sp>
-        <p:nvSpPr>
-          <p:cNvPr id="3" name="Vertical Text Placeholder 2"/>
-          <p:cNvSpPr>
-            <a:spLocks noGrp="1"/>
-          </p:cNvSpPr>
-          <p:nvPr>
-            <p:ph type="body" orient="vert" idx="1"/>
-          </p:nvPr>
-        </p:nvSpPr>
-        <p:spPr/>
-        <p:txBody>
-          <a:bodyPr vert="eaVert"/>
-          <a:lstStyle/>
-          <a:p>
-            <a:pPr lvl="0"/>
-            <a:r>
-              <a:rPr lang="en-US" smtClean="0"/>
-              <a:t>Click to edit Master text styles</a:t>
-            </a:r>
-          </a:p>
-          <a:p>
-            <a:pPr lvl="1"/>
-            <a:r>
-              <a:rPr lang="en-US" smtClean="0"/>
-              <a:t>Second level</a:t>
-            </a:r>
-          </a:p>
-          <a:p>
-            <a:pPr lvl="2"/>
-            <a:r>
-              <a:rPr lang="en-US" smtClean="0"/>
-              <a:t>Third level</a:t>
-            </a:r>
-          </a:p>
-          <a:p>
-            <a:pPr lvl="3"/>
-            <a:r>
-              <a:rPr lang="en-US" smtClean="0"/>
-              <a:t>Fourth level</a:t>
-            </a:r>
-          </a:p>
-          <a:p>
-            <a:pPr lvl="4"/>
-            <a:r>
-              <a:rPr lang="en-US" smtClean="0"/>
-              <a:t>Fifth level</a:t>
-            </a:r>
-            <a:endParaRPr lang="en-US"/>
-          </a:p>
-        </p:txBody>
-      </p:sp>
-      <p:sp>
-        <p:nvSpPr>
-          <p:cNvPr id="4" name="Date Placeholder 3"/>
-          <p:cNvSpPr>
-            <a:spLocks noGrp="1"/>
-          </p:cNvSpPr>
-          <p:nvPr>
-            <p:ph type="dt" sz="half" idx="10"/>
-          </p:nvPr>
-        </p:nvSpPr>
-        <p:spPr/>
-        <p:txBody>
-          <a:bodyPr/>
-          <a:lstStyle/>
-          <a:p>
-            <a:fld id="{5BCAD085-E8A6-8845-BD4E-CB4CCA059FC4}" type="datetimeFigureOut">
-              <a:rPr lang="en-US" smtClean="0"/>
-              <a:t>1/27/13</a:t>
+              <a:t>6/9/2018</a:t>
             </a:fld>
             <a:endParaRPr lang="en-US"/>
           </a:p>
@@ -467,7 +466,13 @@
       </p:sp>
       <p:sp>
         <p:nvSpPr>
-          <p:cNvPr id="5" name="Footer Placeholder 4"/>
+          <p:cNvPr id="5" name="Footer Placeholder 4">
+            <a:extLst>
+              <a:ext uri="{FF2B5EF4-FFF2-40B4-BE49-F238E27FC236}">
+                <a16:creationId xmlns:a16="http://schemas.microsoft.com/office/drawing/2014/main" id="{83DC03F6-C643-4926-885A-44944A9BC6B3}"/>
+              </a:ext>
+            </a:extLst>
+          </p:cNvPr>
           <p:cNvSpPr>
             <a:spLocks noGrp="1"/>
           </p:cNvSpPr>
@@ -486,7 +491,13 @@
       </p:sp>
       <p:sp>
         <p:nvSpPr>
-          <p:cNvPr id="6" name="Slide Number Placeholder 5"/>
+          <p:cNvPr id="6" name="Slide Number Placeholder 5">
+            <a:extLst>
+              <a:ext uri="{FF2B5EF4-FFF2-40B4-BE49-F238E27FC236}">
+                <a16:creationId xmlns:a16="http://schemas.microsoft.com/office/drawing/2014/main" id="{8811CAF7-D8AA-4DA1-B41E-622002F037FD}"/>
+              </a:ext>
+            </a:extLst>
+          </p:cNvPr>
           <p:cNvSpPr>
             <a:spLocks noGrp="1"/>
           </p:cNvSpPr>
@@ -499,7 +510,7 @@
           <a:bodyPr/>
           <a:lstStyle/>
           <a:p>
-            <a:fld id="{C1FF6DA9-008F-8B48-92A6-B652298478BF}" type="slidenum">
+            <a:fld id="{FAF9E467-DE96-4CC8-9A85-14AC8D026622}" type="slidenum">
               <a:rPr lang="en-US" smtClean="0"/>
               <a:t>‹#›</a:t>
             </a:fld>
@@ -510,7 +521,7 @@
     </p:spTree>
     <p:extLst>
       <p:ext uri="{BB962C8B-B14F-4D97-AF65-F5344CB8AC3E}">
-        <p14:creationId xmlns:p14="http://schemas.microsoft.com/office/powerpoint/2010/main" val="2910927964"/>
+        <p14:creationId xmlns:p14="http://schemas.microsoft.com/office/powerpoint/2010/main" val="1283209304"/>
       </p:ext>
     </p:extLst>
   </p:cSld>
@@ -539,7 +550,13 @@
       </p:grpSpPr>
       <p:sp>
         <p:nvSpPr>
-          <p:cNvPr id="2" name="Vertical Title 1"/>
+          <p:cNvPr id="2" name="Vertical Title 1">
+            <a:extLst>
+              <a:ext uri="{FF2B5EF4-FFF2-40B4-BE49-F238E27FC236}">
+                <a16:creationId xmlns:a16="http://schemas.microsoft.com/office/drawing/2014/main" id="{B9ED44A3-5CA0-4086-8A3C-5E15D2FAE181}"/>
+              </a:ext>
+            </a:extLst>
+          </p:cNvPr>
           <p:cNvSpPr>
             <a:spLocks noGrp="1"/>
           </p:cNvSpPr>
@@ -549,8 +566,8 @@
         </p:nvSpPr>
         <p:spPr>
           <a:xfrm>
-            <a:off x="6629400" y="274638"/>
-            <a:ext cx="2057400" cy="5851525"/>
+            <a:off x="8724900" y="365125"/>
+            <a:ext cx="2628900" cy="5811838"/>
           </a:xfrm>
         </p:spPr>
         <p:txBody>
@@ -558,16 +575,21 @@
           <a:lstStyle/>
           <a:p>
             <a:r>
-              <a:rPr lang="en-US" smtClean="0"/>
+              <a:rPr lang="en-US"/>
               <a:t>Click to edit Master title style</a:t>
             </a:r>
-            <a:endParaRPr lang="en-US"/>
-          </a:p>
-        </p:txBody>
-      </p:sp>
-      <p:sp>
-        <p:nvSpPr>
-          <p:cNvPr id="3" name="Vertical Text Placeholder 2"/>
+          </a:p>
+        </p:txBody>
+      </p:sp>
+      <p:sp>
+        <p:nvSpPr>
+          <p:cNvPr id="3" name="Vertical Text Placeholder 2">
+            <a:extLst>
+              <a:ext uri="{FF2B5EF4-FFF2-40B4-BE49-F238E27FC236}">
+                <a16:creationId xmlns:a16="http://schemas.microsoft.com/office/drawing/2014/main" id="{30DDF4AB-6617-4EC4-9A9F-B4F8620947AA}"/>
+              </a:ext>
+            </a:extLst>
+          </p:cNvPr>
           <p:cNvSpPr>
             <a:spLocks noGrp="1"/>
           </p:cNvSpPr>
@@ -577,8 +599,8 @@
         </p:nvSpPr>
         <p:spPr>
           <a:xfrm>
-            <a:off x="457200" y="274638"/>
-            <a:ext cx="6019800" cy="5851525"/>
+            <a:off x="838200" y="365125"/>
+            <a:ext cx="7734300" cy="5811838"/>
           </a:xfrm>
         </p:spPr>
         <p:txBody>
@@ -587,59 +609,64 @@
           <a:p>
             <a:pPr lvl="0"/>
             <a:r>
+              <a:rPr lang="en-US"/>
+              <a:t>Edit Master text styles</a:t>
+            </a:r>
+          </a:p>
+          <a:p>
+            <a:pPr lvl="1"/>
+            <a:r>
+              <a:rPr lang="en-US"/>
+              <a:t>Second level</a:t>
+            </a:r>
+          </a:p>
+          <a:p>
+            <a:pPr lvl="2"/>
+            <a:r>
+              <a:rPr lang="en-US"/>
+              <a:t>Third level</a:t>
+            </a:r>
+          </a:p>
+          <a:p>
+            <a:pPr lvl="3"/>
+            <a:r>
+              <a:rPr lang="en-US"/>
+              <a:t>Fourth level</a:t>
+            </a:r>
+          </a:p>
+          <a:p>
+            <a:pPr lvl="4"/>
+            <a:r>
+              <a:rPr lang="en-US"/>
+              <a:t>Fifth level</a:t>
+            </a:r>
+          </a:p>
+        </p:txBody>
+      </p:sp>
+      <p:sp>
+        <p:nvSpPr>
+          <p:cNvPr id="4" name="Date Placeholder 3">
+            <a:extLst>
+              <a:ext uri="{FF2B5EF4-FFF2-40B4-BE49-F238E27FC236}">
+                <a16:creationId xmlns:a16="http://schemas.microsoft.com/office/drawing/2014/main" id="{7400E2B6-6E36-4B7C-B7B3-5838B27C397D}"/>
+              </a:ext>
+            </a:extLst>
+          </p:cNvPr>
+          <p:cNvSpPr>
+            <a:spLocks noGrp="1"/>
+          </p:cNvSpPr>
+          <p:nvPr>
+            <p:ph type="dt" sz="half" idx="10"/>
+          </p:nvPr>
+        </p:nvSpPr>
+        <p:spPr/>
+        <p:txBody>
+          <a:bodyPr/>
+          <a:lstStyle/>
+          <a:p>
+            <a:fld id="{8D2841BB-5308-4CC0-808C-8C8DAAE974C9}" type="datetimeFigureOut">
               <a:rPr lang="en-US" smtClean="0"/>
-              <a:t>Click to edit Master text styles</a:t>
-            </a:r>
-          </a:p>
-          <a:p>
-            <a:pPr lvl="1"/>
-            <a:r>
-              <a:rPr lang="en-US" smtClean="0"/>
-              <a:t>Second level</a:t>
-            </a:r>
-          </a:p>
-          <a:p>
-            <a:pPr lvl="2"/>
-            <a:r>
-              <a:rPr lang="en-US" smtClean="0"/>
-              <a:t>Third level</a:t>
-            </a:r>
-          </a:p>
-          <a:p>
-            <a:pPr lvl="3"/>
-            <a:r>
-              <a:rPr lang="en-US" smtClean="0"/>
-              <a:t>Fourth level</a:t>
-            </a:r>
-          </a:p>
-          <a:p>
-            <a:pPr lvl="4"/>
-            <a:r>
-              <a:rPr lang="en-US" smtClean="0"/>
-              <a:t>Fifth level</a:t>
-            </a:r>
-            <a:endParaRPr lang="en-US"/>
-          </a:p>
-        </p:txBody>
-      </p:sp>
-      <p:sp>
-        <p:nvSpPr>
-          <p:cNvPr id="4" name="Date Placeholder 3"/>
-          <p:cNvSpPr>
-            <a:spLocks noGrp="1"/>
-          </p:cNvSpPr>
-          <p:nvPr>
-            <p:ph type="dt" sz="half" idx="10"/>
-          </p:nvPr>
-        </p:nvSpPr>
-        <p:spPr/>
-        <p:txBody>
-          <a:bodyPr/>
-          <a:lstStyle/>
-          <a:p>
-            <a:fld id="{5BCAD085-E8A6-8845-BD4E-CB4CCA059FC4}" type="datetimeFigureOut">
-              <a:rPr lang="en-US" smtClean="0"/>
-              <a:t>1/27/13</a:t>
+              <a:t>6/9/2018</a:t>
             </a:fld>
             <a:endParaRPr lang="en-US"/>
           </a:p>
@@ -647,7 +674,13 @@
       </p:sp>
       <p:sp>
         <p:nvSpPr>
-          <p:cNvPr id="5" name="Footer Placeholder 4"/>
+          <p:cNvPr id="5" name="Footer Placeholder 4">
+            <a:extLst>
+              <a:ext uri="{FF2B5EF4-FFF2-40B4-BE49-F238E27FC236}">
+                <a16:creationId xmlns:a16="http://schemas.microsoft.com/office/drawing/2014/main" id="{F18C0331-D57A-428C-B478-28BC75E5955A}"/>
+              </a:ext>
+            </a:extLst>
+          </p:cNvPr>
           <p:cNvSpPr>
             <a:spLocks noGrp="1"/>
           </p:cNvSpPr>
@@ -666,7 +699,13 @@
       </p:sp>
       <p:sp>
         <p:nvSpPr>
-          <p:cNvPr id="6" name="Slide Number Placeholder 5"/>
+          <p:cNvPr id="6" name="Slide Number Placeholder 5">
+            <a:extLst>
+              <a:ext uri="{FF2B5EF4-FFF2-40B4-BE49-F238E27FC236}">
+                <a16:creationId xmlns:a16="http://schemas.microsoft.com/office/drawing/2014/main" id="{808B35D7-79D6-4A1D-9CEC-48AAB2D4111E}"/>
+              </a:ext>
+            </a:extLst>
+          </p:cNvPr>
           <p:cNvSpPr>
             <a:spLocks noGrp="1"/>
           </p:cNvSpPr>
@@ -679,7 +718,7 @@
           <a:bodyPr/>
           <a:lstStyle/>
           <a:p>
-            <a:fld id="{C1FF6DA9-008F-8B48-92A6-B652298478BF}" type="slidenum">
+            <a:fld id="{FAF9E467-DE96-4CC8-9A85-14AC8D026622}" type="slidenum">
               <a:rPr lang="en-US" smtClean="0"/>
               <a:t>‹#›</a:t>
             </a:fld>
@@ -690,7 +729,7 @@
     </p:spTree>
     <p:extLst>
       <p:ext uri="{BB962C8B-B14F-4D97-AF65-F5344CB8AC3E}">
-        <p14:creationId xmlns:p14="http://schemas.microsoft.com/office/powerpoint/2010/main" val="3612223792"/>
+        <p14:creationId xmlns:p14="http://schemas.microsoft.com/office/powerpoint/2010/main" val="1741046505"/>
       </p:ext>
     </p:extLst>
   </p:cSld>
@@ -719,7 +758,13 @@
       </p:grpSpPr>
       <p:sp>
         <p:nvSpPr>
-          <p:cNvPr id="2" name="Title 1"/>
+          <p:cNvPr id="2" name="Title 1">
+            <a:extLst>
+              <a:ext uri="{FF2B5EF4-FFF2-40B4-BE49-F238E27FC236}">
+                <a16:creationId xmlns:a16="http://schemas.microsoft.com/office/drawing/2014/main" id="{5A9F5060-621F-476A-8E8A-73905A46F93D}"/>
+              </a:ext>
+            </a:extLst>
+          </p:cNvPr>
           <p:cNvSpPr>
             <a:spLocks noGrp="1"/>
           </p:cNvSpPr>
@@ -733,83 +778,93 @@
           <a:lstStyle/>
           <a:p>
             <a:r>
+              <a:rPr lang="en-US"/>
+              <a:t>Click to edit Master title style</a:t>
+            </a:r>
+          </a:p>
+        </p:txBody>
+      </p:sp>
+      <p:sp>
+        <p:nvSpPr>
+          <p:cNvPr id="3" name="Content Placeholder 2">
+            <a:extLst>
+              <a:ext uri="{FF2B5EF4-FFF2-40B4-BE49-F238E27FC236}">
+                <a16:creationId xmlns:a16="http://schemas.microsoft.com/office/drawing/2014/main" id="{7CA833E0-1197-4171-9A15-12C9D75F99FF}"/>
+              </a:ext>
+            </a:extLst>
+          </p:cNvPr>
+          <p:cNvSpPr>
+            <a:spLocks noGrp="1"/>
+          </p:cNvSpPr>
+          <p:nvPr>
+            <p:ph idx="1"/>
+          </p:nvPr>
+        </p:nvSpPr>
+        <p:spPr/>
+        <p:txBody>
+          <a:bodyPr/>
+          <a:lstStyle/>
+          <a:p>
+            <a:pPr lvl="0"/>
+            <a:r>
+              <a:rPr lang="en-US"/>
+              <a:t>Edit Master text styles</a:t>
+            </a:r>
+          </a:p>
+          <a:p>
+            <a:pPr lvl="1"/>
+            <a:r>
+              <a:rPr lang="en-US"/>
+              <a:t>Second level</a:t>
+            </a:r>
+          </a:p>
+          <a:p>
+            <a:pPr lvl="2"/>
+            <a:r>
+              <a:rPr lang="en-US"/>
+              <a:t>Third level</a:t>
+            </a:r>
+          </a:p>
+          <a:p>
+            <a:pPr lvl="3"/>
+            <a:r>
+              <a:rPr lang="en-US"/>
+              <a:t>Fourth level</a:t>
+            </a:r>
+          </a:p>
+          <a:p>
+            <a:pPr lvl="4"/>
+            <a:r>
+              <a:rPr lang="en-US"/>
+              <a:t>Fifth level</a:t>
+            </a:r>
+          </a:p>
+        </p:txBody>
+      </p:sp>
+      <p:sp>
+        <p:nvSpPr>
+          <p:cNvPr id="4" name="Date Placeholder 3">
+            <a:extLst>
+              <a:ext uri="{FF2B5EF4-FFF2-40B4-BE49-F238E27FC236}">
+                <a16:creationId xmlns:a16="http://schemas.microsoft.com/office/drawing/2014/main" id="{5FA5A942-5E04-432D-BD00-DC867BEE671F}"/>
+              </a:ext>
+            </a:extLst>
+          </p:cNvPr>
+          <p:cNvSpPr>
+            <a:spLocks noGrp="1"/>
+          </p:cNvSpPr>
+          <p:nvPr>
+            <p:ph type="dt" sz="half" idx="10"/>
+          </p:nvPr>
+        </p:nvSpPr>
+        <p:spPr/>
+        <p:txBody>
+          <a:bodyPr/>
+          <a:lstStyle/>
+          <a:p>
+            <a:fld id="{8D2841BB-5308-4CC0-808C-8C8DAAE974C9}" type="datetimeFigureOut">
               <a:rPr lang="en-US" smtClean="0"/>
-              <a:t>Click to edit Master title style</a:t>
-            </a:r>
-            <a:endParaRPr lang="en-US"/>
-          </a:p>
-        </p:txBody>
-      </p:sp>
-      <p:sp>
-        <p:nvSpPr>
-          <p:cNvPr id="3" name="Content Placeholder 2"/>
-          <p:cNvSpPr>
-            <a:spLocks noGrp="1"/>
-          </p:cNvSpPr>
-          <p:nvPr>
-            <p:ph idx="1"/>
-          </p:nvPr>
-        </p:nvSpPr>
-        <p:spPr/>
-        <p:txBody>
-          <a:bodyPr/>
-          <a:lstStyle/>
-          <a:p>
-            <a:pPr lvl="0"/>
-            <a:r>
-              <a:rPr lang="en-US" smtClean="0"/>
-              <a:t>Click to edit Master text styles</a:t>
-            </a:r>
-          </a:p>
-          <a:p>
-            <a:pPr lvl="1"/>
-            <a:r>
-              <a:rPr lang="en-US" smtClean="0"/>
-              <a:t>Second level</a:t>
-            </a:r>
-          </a:p>
-          <a:p>
-            <a:pPr lvl="2"/>
-            <a:r>
-              <a:rPr lang="en-US" smtClean="0"/>
-              <a:t>Third level</a:t>
-            </a:r>
-          </a:p>
-          <a:p>
-            <a:pPr lvl="3"/>
-            <a:r>
-              <a:rPr lang="en-US" smtClean="0"/>
-              <a:t>Fourth level</a:t>
-            </a:r>
-          </a:p>
-          <a:p>
-            <a:pPr lvl="4"/>
-            <a:r>
-              <a:rPr lang="en-US" smtClean="0"/>
-              <a:t>Fifth level</a:t>
-            </a:r>
-            <a:endParaRPr lang="en-US"/>
-          </a:p>
-        </p:txBody>
-      </p:sp>
-      <p:sp>
-        <p:nvSpPr>
-          <p:cNvPr id="4" name="Date Placeholder 3"/>
-          <p:cNvSpPr>
-            <a:spLocks noGrp="1"/>
-          </p:cNvSpPr>
-          <p:nvPr>
-            <p:ph type="dt" sz="half" idx="10"/>
-          </p:nvPr>
-        </p:nvSpPr>
-        <p:spPr/>
-        <p:txBody>
-          <a:bodyPr/>
-          <a:lstStyle/>
-          <a:p>
-            <a:fld id="{5BCAD085-E8A6-8845-BD4E-CB4CCA059FC4}" type="datetimeFigureOut">
-              <a:rPr lang="en-US" smtClean="0"/>
-              <a:t>1/27/13</a:t>
+              <a:t>6/9/2018</a:t>
             </a:fld>
             <a:endParaRPr lang="en-US"/>
           </a:p>
@@ -817,7 +872,13 @@
       </p:sp>
       <p:sp>
         <p:nvSpPr>
-          <p:cNvPr id="5" name="Footer Placeholder 4"/>
+          <p:cNvPr id="5" name="Footer Placeholder 4">
+            <a:extLst>
+              <a:ext uri="{FF2B5EF4-FFF2-40B4-BE49-F238E27FC236}">
+                <a16:creationId xmlns:a16="http://schemas.microsoft.com/office/drawing/2014/main" id="{8ACE3084-91DF-4E0E-9AA0-20CD8393D5D2}"/>
+              </a:ext>
+            </a:extLst>
+          </p:cNvPr>
           <p:cNvSpPr>
             <a:spLocks noGrp="1"/>
           </p:cNvSpPr>
@@ -836,7 +897,13 @@
       </p:sp>
       <p:sp>
         <p:nvSpPr>
-          <p:cNvPr id="6" name="Slide Number Placeholder 5"/>
+          <p:cNvPr id="6" name="Slide Number Placeholder 5">
+            <a:extLst>
+              <a:ext uri="{FF2B5EF4-FFF2-40B4-BE49-F238E27FC236}">
+                <a16:creationId xmlns:a16="http://schemas.microsoft.com/office/drawing/2014/main" id="{E01FC8F9-DB58-443E-B11D-44060D5C405A}"/>
+              </a:ext>
+            </a:extLst>
+          </p:cNvPr>
           <p:cNvSpPr>
             <a:spLocks noGrp="1"/>
           </p:cNvSpPr>
@@ -849,7 +916,7 @@
           <a:bodyPr/>
           <a:lstStyle/>
           <a:p>
-            <a:fld id="{C1FF6DA9-008F-8B48-92A6-B652298478BF}" type="slidenum">
+            <a:fld id="{FAF9E467-DE96-4CC8-9A85-14AC8D026622}" type="slidenum">
               <a:rPr lang="en-US" smtClean="0"/>
               <a:t>‹#›</a:t>
             </a:fld>
@@ -860,7 +927,7 @@
     </p:spTree>
     <p:extLst>
       <p:ext uri="{BB962C8B-B14F-4D97-AF65-F5344CB8AC3E}">
-        <p14:creationId xmlns:p14="http://schemas.microsoft.com/office/powerpoint/2010/main" val="2614314258"/>
+        <p14:creationId xmlns:p14="http://schemas.microsoft.com/office/powerpoint/2010/main" val="1613455086"/>
       </p:ext>
     </p:extLst>
   </p:cSld>
@@ -889,7 +956,13 @@
       </p:grpSpPr>
       <p:sp>
         <p:nvSpPr>
-          <p:cNvPr id="2" name="Title 1"/>
+          <p:cNvPr id="2" name="Title 1">
+            <a:extLst>
+              <a:ext uri="{FF2B5EF4-FFF2-40B4-BE49-F238E27FC236}">
+                <a16:creationId xmlns:a16="http://schemas.microsoft.com/office/drawing/2014/main" id="{144911BD-8BDF-4889-9AEB-C42C66293077}"/>
+              </a:ext>
+            </a:extLst>
+          </p:cNvPr>
           <p:cNvSpPr>
             <a:spLocks noGrp="1"/>
           </p:cNvSpPr>
@@ -899,29 +972,34 @@
         </p:nvSpPr>
         <p:spPr>
           <a:xfrm>
-            <a:off x="722313" y="4406900"/>
-            <a:ext cx="7772400" cy="1362075"/>
+            <a:off x="831850" y="1709738"/>
+            <a:ext cx="10515600" cy="2852737"/>
           </a:xfrm>
         </p:spPr>
         <p:txBody>
-          <a:bodyPr anchor="t"/>
+          <a:bodyPr anchor="b"/>
           <a:lstStyle>
-            <a:lvl1pPr algn="l">
-              <a:defRPr sz="4000" b="1" cap="all"/>
+            <a:lvl1pPr>
+              <a:defRPr sz="6000"/>
             </a:lvl1pPr>
           </a:lstStyle>
           <a:p>
             <a:r>
-              <a:rPr lang="en-US" smtClean="0"/>
+              <a:rPr lang="en-US"/>
               <a:t>Click to edit Master title style</a:t>
             </a:r>
-            <a:endParaRPr lang="en-US"/>
-          </a:p>
-        </p:txBody>
-      </p:sp>
-      <p:sp>
-        <p:nvSpPr>
-          <p:cNvPr id="3" name="Text Placeholder 2"/>
+          </a:p>
+        </p:txBody>
+      </p:sp>
+      <p:sp>
+        <p:nvSpPr>
+          <p:cNvPr id="3" name="Text Placeholder 2">
+            <a:extLst>
+              <a:ext uri="{FF2B5EF4-FFF2-40B4-BE49-F238E27FC236}">
+                <a16:creationId xmlns:a16="http://schemas.microsoft.com/office/drawing/2014/main" id="{9F964DA3-B5E1-4BFD-BF15-E875DBA98BAD}"/>
+              </a:ext>
+            </a:extLst>
+          </p:cNvPr>
           <p:cNvSpPr>
             <a:spLocks noGrp="1"/>
           </p:cNvSpPr>
@@ -931,16 +1009,16 @@
         </p:nvSpPr>
         <p:spPr>
           <a:xfrm>
-            <a:off x="722313" y="2906713"/>
-            <a:ext cx="7772400" cy="1500187"/>
+            <a:off x="831850" y="4589463"/>
+            <a:ext cx="10515600" cy="1500187"/>
           </a:xfrm>
         </p:spPr>
         <p:txBody>
-          <a:bodyPr anchor="b"/>
+          <a:bodyPr/>
           <a:lstStyle>
             <a:lvl1pPr marL="0" indent="0">
               <a:buNone/>
-              <a:defRPr sz="2000">
+              <a:defRPr sz="2400">
                 <a:solidFill>
                   <a:schemeClr val="tx1">
                     <a:tint val="75000"/>
@@ -950,7 +1028,7 @@
             </a:lvl1pPr>
             <a:lvl2pPr marL="457200" indent="0">
               <a:buNone/>
-              <a:defRPr sz="1800">
+              <a:defRPr sz="2000">
                 <a:solidFill>
                   <a:schemeClr val="tx1">
                     <a:tint val="75000"/>
@@ -960,7 +1038,7 @@
             </a:lvl2pPr>
             <a:lvl3pPr marL="914400" indent="0">
               <a:buNone/>
-              <a:defRPr sz="1600">
+              <a:defRPr sz="1800">
                 <a:solidFill>
                   <a:schemeClr val="tx1">
                     <a:tint val="75000"/>
@@ -970,7 +1048,7 @@
             </a:lvl3pPr>
             <a:lvl4pPr marL="1371600" indent="0">
               <a:buNone/>
-              <a:defRPr sz="1400">
+              <a:defRPr sz="1600">
                 <a:solidFill>
                   <a:schemeClr val="tx1">
                     <a:tint val="75000"/>
@@ -980,7 +1058,7 @@
             </a:lvl4pPr>
             <a:lvl5pPr marL="1828800" indent="0">
               <a:buNone/>
-              <a:defRPr sz="1400">
+              <a:defRPr sz="1600">
                 <a:solidFill>
                   <a:schemeClr val="tx1">
                     <a:tint val="75000"/>
@@ -990,7 +1068,7 @@
             </a:lvl5pPr>
             <a:lvl6pPr marL="2286000" indent="0">
               <a:buNone/>
-              <a:defRPr sz="1400">
+              <a:defRPr sz="1600">
                 <a:solidFill>
                   <a:schemeClr val="tx1">
                     <a:tint val="75000"/>
@@ -1000,7 +1078,7 @@
             </a:lvl6pPr>
             <a:lvl7pPr marL="2743200" indent="0">
               <a:buNone/>
-              <a:defRPr sz="1400">
+              <a:defRPr sz="1600">
                 <a:solidFill>
                   <a:schemeClr val="tx1">
                     <a:tint val="75000"/>
@@ -1010,7 +1088,7 @@
             </a:lvl7pPr>
             <a:lvl8pPr marL="3200400" indent="0">
               <a:buNone/>
-              <a:defRPr sz="1400">
+              <a:defRPr sz="1600">
                 <a:solidFill>
                   <a:schemeClr val="tx1">
                     <a:tint val="75000"/>
@@ -1020,7 +1098,7 @@
             </a:lvl8pPr>
             <a:lvl9pPr marL="3657600" indent="0">
               <a:buNone/>
-              <a:defRPr sz="1400">
+              <a:defRPr sz="1600">
                 <a:solidFill>
                   <a:schemeClr val="tx1">
                     <a:tint val="75000"/>
@@ -1032,30 +1110,36 @@
           <a:p>
             <a:pPr lvl="0"/>
             <a:r>
+              <a:rPr lang="en-US"/>
+              <a:t>Edit Master text styles</a:t>
+            </a:r>
+          </a:p>
+        </p:txBody>
+      </p:sp>
+      <p:sp>
+        <p:nvSpPr>
+          <p:cNvPr id="4" name="Date Placeholder 3">
+            <a:extLst>
+              <a:ext uri="{FF2B5EF4-FFF2-40B4-BE49-F238E27FC236}">
+                <a16:creationId xmlns:a16="http://schemas.microsoft.com/office/drawing/2014/main" id="{CBABAE1C-ABF1-46AA-AEDB-D5DEC8FF1F5D}"/>
+              </a:ext>
+            </a:extLst>
+          </p:cNvPr>
+          <p:cNvSpPr>
+            <a:spLocks noGrp="1"/>
+          </p:cNvSpPr>
+          <p:nvPr>
+            <p:ph type="dt" sz="half" idx="10"/>
+          </p:nvPr>
+        </p:nvSpPr>
+        <p:spPr/>
+        <p:txBody>
+          <a:bodyPr/>
+          <a:lstStyle/>
+          <a:p>
+            <a:fld id="{8D2841BB-5308-4CC0-808C-8C8DAAE974C9}" type="datetimeFigureOut">
               <a:rPr lang="en-US" smtClean="0"/>
-              <a:t>Click to edit Master text styles</a:t>
-            </a:r>
-          </a:p>
-        </p:txBody>
-      </p:sp>
-      <p:sp>
-        <p:nvSpPr>
-          <p:cNvPr id="4" name="Date Placeholder 3"/>
-          <p:cNvSpPr>
-            <a:spLocks noGrp="1"/>
-          </p:cNvSpPr>
-          <p:nvPr>
-            <p:ph type="dt" sz="half" idx="10"/>
-          </p:nvPr>
-        </p:nvSpPr>
-        <p:spPr/>
-        <p:txBody>
-          <a:bodyPr/>
-          <a:lstStyle/>
-          <a:p>
-            <a:fld id="{5BCAD085-E8A6-8845-BD4E-CB4CCA059FC4}" type="datetimeFigureOut">
-              <a:rPr lang="en-US" smtClean="0"/>
-              <a:t>1/27/13</a:t>
+              <a:t>6/9/2018</a:t>
             </a:fld>
             <a:endParaRPr lang="en-US"/>
           </a:p>
@@ -1063,7 +1147,13 @@
       </p:sp>
       <p:sp>
         <p:nvSpPr>
-          <p:cNvPr id="5" name="Footer Placeholder 4"/>
+          <p:cNvPr id="5" name="Footer Placeholder 4">
+            <a:extLst>
+              <a:ext uri="{FF2B5EF4-FFF2-40B4-BE49-F238E27FC236}">
+                <a16:creationId xmlns:a16="http://schemas.microsoft.com/office/drawing/2014/main" id="{11525200-ED5D-4100-9408-0FDBBFF365B8}"/>
+              </a:ext>
+            </a:extLst>
+          </p:cNvPr>
           <p:cNvSpPr>
             <a:spLocks noGrp="1"/>
           </p:cNvSpPr>
@@ -1082,7 +1172,13 @@
       </p:sp>
       <p:sp>
         <p:nvSpPr>
-          <p:cNvPr id="6" name="Slide Number Placeholder 5"/>
+          <p:cNvPr id="6" name="Slide Number Placeholder 5">
+            <a:extLst>
+              <a:ext uri="{FF2B5EF4-FFF2-40B4-BE49-F238E27FC236}">
+                <a16:creationId xmlns:a16="http://schemas.microsoft.com/office/drawing/2014/main" id="{90B93766-F1B5-415B-A4E7-CCBC6C65E9BD}"/>
+              </a:ext>
+            </a:extLst>
+          </p:cNvPr>
           <p:cNvSpPr>
             <a:spLocks noGrp="1"/>
           </p:cNvSpPr>
@@ -1095,7 +1191,7 @@
           <a:bodyPr/>
           <a:lstStyle/>
           <a:p>
-            <a:fld id="{C1FF6DA9-008F-8B48-92A6-B652298478BF}" type="slidenum">
+            <a:fld id="{FAF9E467-DE96-4CC8-9A85-14AC8D026622}" type="slidenum">
               <a:rPr lang="en-US" smtClean="0"/>
               <a:t>‹#›</a:t>
             </a:fld>
@@ -1106,7 +1202,7 @@
     </p:spTree>
     <p:extLst>
       <p:ext uri="{BB962C8B-B14F-4D97-AF65-F5344CB8AC3E}">
-        <p14:creationId xmlns:p14="http://schemas.microsoft.com/office/powerpoint/2010/main" val="960648375"/>
+        <p14:creationId xmlns:p14="http://schemas.microsoft.com/office/powerpoint/2010/main" val="1833496995"/>
       </p:ext>
     </p:extLst>
   </p:cSld>
@@ -1135,7 +1231,13 @@
       </p:grpSpPr>
       <p:sp>
         <p:nvSpPr>
-          <p:cNvPr id="2" name="Title 1"/>
+          <p:cNvPr id="2" name="Title 1">
+            <a:extLst>
+              <a:ext uri="{FF2B5EF4-FFF2-40B4-BE49-F238E27FC236}">
+                <a16:creationId xmlns:a16="http://schemas.microsoft.com/office/drawing/2014/main" id="{904C3403-EEAF-4F1B-9897-B21BAEB5897E}"/>
+              </a:ext>
+            </a:extLst>
+          </p:cNvPr>
           <p:cNvSpPr>
             <a:spLocks noGrp="1"/>
           </p:cNvSpPr>
@@ -1149,16 +1251,21 @@
           <a:lstStyle/>
           <a:p>
             <a:r>
-              <a:rPr lang="en-US" smtClean="0"/>
+              <a:rPr lang="en-US"/>
               <a:t>Click to edit Master title style</a:t>
             </a:r>
-            <a:endParaRPr lang="en-US"/>
-          </a:p>
-        </p:txBody>
-      </p:sp>
-      <p:sp>
-        <p:nvSpPr>
-          <p:cNvPr id="3" name="Content Placeholder 2"/>
+          </a:p>
+        </p:txBody>
+      </p:sp>
+      <p:sp>
+        <p:nvSpPr>
+          <p:cNvPr id="3" name="Content Placeholder 2">
+            <a:extLst>
+              <a:ext uri="{FF2B5EF4-FFF2-40B4-BE49-F238E27FC236}">
+                <a16:creationId xmlns:a16="http://schemas.microsoft.com/office/drawing/2014/main" id="{FFA57D0C-619E-4241-AEA7-055C6113BED8}"/>
+              </a:ext>
+            </a:extLst>
+          </p:cNvPr>
           <p:cNvSpPr>
             <a:spLocks noGrp="1"/>
           </p:cNvSpPr>
@@ -1168,82 +1275,59 @@
         </p:nvSpPr>
         <p:spPr>
           <a:xfrm>
-            <a:off x="457200" y="1600200"/>
-            <a:ext cx="4038600" cy="4525963"/>
+            <a:off x="838200" y="1825625"/>
+            <a:ext cx="5181600" cy="4351338"/>
           </a:xfrm>
         </p:spPr>
         <p:txBody>
           <a:bodyPr/>
-          <a:lstStyle>
-            <a:lvl1pPr>
-              <a:defRPr sz="2800"/>
-            </a:lvl1pPr>
-            <a:lvl2pPr>
-              <a:defRPr sz="2400"/>
-            </a:lvl2pPr>
-            <a:lvl3pPr>
-              <a:defRPr sz="2000"/>
-            </a:lvl3pPr>
-            <a:lvl4pPr>
-              <a:defRPr sz="1800"/>
-            </a:lvl4pPr>
-            <a:lvl5pPr>
-              <a:defRPr sz="1800"/>
-            </a:lvl5pPr>
-            <a:lvl6pPr>
-              <a:defRPr sz="1800"/>
-            </a:lvl6pPr>
-            <a:lvl7pPr>
-              <a:defRPr sz="1800"/>
-            </a:lvl7pPr>
-            <a:lvl8pPr>
-              <a:defRPr sz="1800"/>
-            </a:lvl8pPr>
-            <a:lvl9pPr>
-              <a:defRPr sz="1800"/>
-            </a:lvl9pPr>
-          </a:lstStyle>
+          <a:lstStyle/>
           <a:p>
             <a:pPr lvl="0"/>
             <a:r>
-              <a:rPr lang="en-US" smtClean="0"/>
-              <a:t>Click to edit Master text styles</a:t>
+              <a:rPr lang="en-US"/>
+              <a:t>Edit Master text styles</a:t>
             </a:r>
           </a:p>
           <a:p>
             <a:pPr lvl="1"/>
             <a:r>
-              <a:rPr lang="en-US" smtClean="0"/>
+              <a:rPr lang="en-US"/>
               <a:t>Second level</a:t>
             </a:r>
           </a:p>
           <a:p>
             <a:pPr lvl="2"/>
             <a:r>
-              <a:rPr lang="en-US" smtClean="0"/>
+              <a:rPr lang="en-US"/>
               <a:t>Third level</a:t>
             </a:r>
           </a:p>
           <a:p>
             <a:pPr lvl="3"/>
             <a:r>
-              <a:rPr lang="en-US" smtClean="0"/>
+              <a:rPr lang="en-US"/>
               <a:t>Fourth level</a:t>
             </a:r>
           </a:p>
           <a:p>
             <a:pPr lvl="4"/>
             <a:r>
-              <a:rPr lang="en-US" smtClean="0"/>
+              <a:rPr lang="en-US"/>
               <a:t>Fifth level</a:t>
             </a:r>
-            <a:endParaRPr lang="en-US"/>
-          </a:p>
-        </p:txBody>
-      </p:sp>
-      <p:sp>
-        <p:nvSpPr>
-          <p:cNvPr id="4" name="Content Placeholder 3"/>
+          </a:p>
+        </p:txBody>
+      </p:sp>
+      <p:sp>
+        <p:nvSpPr>
+          <p:cNvPr id="4" name="Content Placeholder 3">
+            <a:extLst>
+              <a:ext uri="{FF2B5EF4-FFF2-40B4-BE49-F238E27FC236}">
+                <a16:creationId xmlns:a16="http://schemas.microsoft.com/office/drawing/2014/main" id="{CEB11022-DF78-47C4-9E3A-EE83445F9E17}"/>
+              </a:ext>
+            </a:extLst>
+          </p:cNvPr>
           <p:cNvSpPr>
             <a:spLocks noGrp="1"/>
           </p:cNvSpPr>
@@ -1253,97 +1337,74 @@
         </p:nvSpPr>
         <p:spPr>
           <a:xfrm>
-            <a:off x="4648200" y="1600200"/>
-            <a:ext cx="4038600" cy="4525963"/>
+            <a:off x="6172200" y="1825625"/>
+            <a:ext cx="5181600" cy="4351338"/>
           </a:xfrm>
         </p:spPr>
         <p:txBody>
           <a:bodyPr/>
-          <a:lstStyle>
-            <a:lvl1pPr>
-              <a:defRPr sz="2800"/>
-            </a:lvl1pPr>
-            <a:lvl2pPr>
-              <a:defRPr sz="2400"/>
-            </a:lvl2pPr>
-            <a:lvl3pPr>
-              <a:defRPr sz="2000"/>
-            </a:lvl3pPr>
-            <a:lvl4pPr>
-              <a:defRPr sz="1800"/>
-            </a:lvl4pPr>
-            <a:lvl5pPr>
-              <a:defRPr sz="1800"/>
-            </a:lvl5pPr>
-            <a:lvl6pPr>
-              <a:defRPr sz="1800"/>
-            </a:lvl6pPr>
-            <a:lvl7pPr>
-              <a:defRPr sz="1800"/>
-            </a:lvl7pPr>
-            <a:lvl8pPr>
-              <a:defRPr sz="1800"/>
-            </a:lvl8pPr>
-            <a:lvl9pPr>
-              <a:defRPr sz="1800"/>
-            </a:lvl9pPr>
-          </a:lstStyle>
+          <a:lstStyle/>
           <a:p>
             <a:pPr lvl="0"/>
             <a:r>
+              <a:rPr lang="en-US"/>
+              <a:t>Edit Master text styles</a:t>
+            </a:r>
+          </a:p>
+          <a:p>
+            <a:pPr lvl="1"/>
+            <a:r>
+              <a:rPr lang="en-US"/>
+              <a:t>Second level</a:t>
+            </a:r>
+          </a:p>
+          <a:p>
+            <a:pPr lvl="2"/>
+            <a:r>
+              <a:rPr lang="en-US"/>
+              <a:t>Third level</a:t>
+            </a:r>
+          </a:p>
+          <a:p>
+            <a:pPr lvl="3"/>
+            <a:r>
+              <a:rPr lang="en-US"/>
+              <a:t>Fourth level</a:t>
+            </a:r>
+          </a:p>
+          <a:p>
+            <a:pPr lvl="4"/>
+            <a:r>
+              <a:rPr lang="en-US"/>
+              <a:t>Fifth level</a:t>
+            </a:r>
+          </a:p>
+        </p:txBody>
+      </p:sp>
+      <p:sp>
+        <p:nvSpPr>
+          <p:cNvPr id="5" name="Date Placeholder 4">
+            <a:extLst>
+              <a:ext uri="{FF2B5EF4-FFF2-40B4-BE49-F238E27FC236}">
+                <a16:creationId xmlns:a16="http://schemas.microsoft.com/office/drawing/2014/main" id="{1AA557F8-69D1-4C9A-BDEC-F8F2BC3CD9C2}"/>
+              </a:ext>
+            </a:extLst>
+          </p:cNvPr>
+          <p:cNvSpPr>
+            <a:spLocks noGrp="1"/>
+          </p:cNvSpPr>
+          <p:nvPr>
+            <p:ph type="dt" sz="half" idx="10"/>
+          </p:nvPr>
+        </p:nvSpPr>
+        <p:spPr/>
+        <p:txBody>
+          <a:bodyPr/>
+          <a:lstStyle/>
+          <a:p>
+            <a:fld id="{8D2841BB-5308-4CC0-808C-8C8DAAE974C9}" type="datetimeFigureOut">
               <a:rPr lang="en-US" smtClean="0"/>
-              <a:t>Click to edit Master text styles</a:t>
-            </a:r>
-          </a:p>
-          <a:p>
-            <a:pPr lvl="1"/>
-            <a:r>
-              <a:rPr lang="en-US" smtClean="0"/>
-              <a:t>Second level</a:t>
-            </a:r>
-          </a:p>
-          <a:p>
-            <a:pPr lvl="2"/>
-            <a:r>
-              <a:rPr lang="en-US" smtClean="0"/>
-              <a:t>Third level</a:t>
-            </a:r>
-          </a:p>
-          <a:p>
-            <a:pPr lvl="3"/>
-            <a:r>
-              <a:rPr lang="en-US" smtClean="0"/>
-              <a:t>Fourth level</a:t>
-            </a:r>
-          </a:p>
-          <a:p>
-            <a:pPr lvl="4"/>
-            <a:r>
-              <a:rPr lang="en-US" smtClean="0"/>
-              <a:t>Fifth level</a:t>
-            </a:r>
-            <a:endParaRPr lang="en-US"/>
-          </a:p>
-        </p:txBody>
-      </p:sp>
-      <p:sp>
-        <p:nvSpPr>
-          <p:cNvPr id="5" name="Date Placeholder 4"/>
-          <p:cNvSpPr>
-            <a:spLocks noGrp="1"/>
-          </p:cNvSpPr>
-          <p:nvPr>
-            <p:ph type="dt" sz="half" idx="10"/>
-          </p:nvPr>
-        </p:nvSpPr>
-        <p:spPr/>
-        <p:txBody>
-          <a:bodyPr/>
-          <a:lstStyle/>
-          <a:p>
-            <a:fld id="{5BCAD085-E8A6-8845-BD4E-CB4CCA059FC4}" type="datetimeFigureOut">
-              <a:rPr lang="en-US" smtClean="0"/>
-              <a:t>1/27/13</a:t>
+              <a:t>6/9/2018</a:t>
             </a:fld>
             <a:endParaRPr lang="en-US"/>
           </a:p>
@@ -1351,7 +1412,13 @@
       </p:sp>
       <p:sp>
         <p:nvSpPr>
-          <p:cNvPr id="6" name="Footer Placeholder 5"/>
+          <p:cNvPr id="6" name="Footer Placeholder 5">
+            <a:extLst>
+              <a:ext uri="{FF2B5EF4-FFF2-40B4-BE49-F238E27FC236}">
+                <a16:creationId xmlns:a16="http://schemas.microsoft.com/office/drawing/2014/main" id="{0FB16DED-EAEA-46F9-B401-3C7BF296DAB4}"/>
+              </a:ext>
+            </a:extLst>
+          </p:cNvPr>
           <p:cNvSpPr>
             <a:spLocks noGrp="1"/>
           </p:cNvSpPr>
@@ -1370,7 +1437,13 @@
       </p:sp>
       <p:sp>
         <p:nvSpPr>
-          <p:cNvPr id="7" name="Slide Number Placeholder 6"/>
+          <p:cNvPr id="7" name="Slide Number Placeholder 6">
+            <a:extLst>
+              <a:ext uri="{FF2B5EF4-FFF2-40B4-BE49-F238E27FC236}">
+                <a16:creationId xmlns:a16="http://schemas.microsoft.com/office/drawing/2014/main" id="{0455D13C-051A-4502-A610-97FC2DBD2923}"/>
+              </a:ext>
+            </a:extLst>
+          </p:cNvPr>
           <p:cNvSpPr>
             <a:spLocks noGrp="1"/>
           </p:cNvSpPr>
@@ -1383,7 +1456,7 @@
           <a:bodyPr/>
           <a:lstStyle/>
           <a:p>
-            <a:fld id="{C1FF6DA9-008F-8B48-92A6-B652298478BF}" type="slidenum">
+            <a:fld id="{FAF9E467-DE96-4CC8-9A85-14AC8D026622}" type="slidenum">
               <a:rPr lang="en-US" smtClean="0"/>
               <a:t>‹#›</a:t>
             </a:fld>
@@ -1394,7 +1467,7 @@
     </p:spTree>
     <p:extLst>
       <p:ext uri="{BB962C8B-B14F-4D97-AF65-F5344CB8AC3E}">
-        <p14:creationId xmlns:p14="http://schemas.microsoft.com/office/powerpoint/2010/main" val="2782244947"/>
+        <p14:creationId xmlns:p14="http://schemas.microsoft.com/office/powerpoint/2010/main" val="2129849765"/>
       </p:ext>
     </p:extLst>
   </p:cSld>
@@ -1423,45 +1496,57 @@
       </p:grpSpPr>
       <p:sp>
         <p:nvSpPr>
-          <p:cNvPr id="2" name="Title 1"/>
+          <p:cNvPr id="2" name="Title 1">
+            <a:extLst>
+              <a:ext uri="{FF2B5EF4-FFF2-40B4-BE49-F238E27FC236}">
+                <a16:creationId xmlns:a16="http://schemas.microsoft.com/office/drawing/2014/main" id="{FC224C78-7971-447E-8F97-D8939F55F266}"/>
+              </a:ext>
+            </a:extLst>
+          </p:cNvPr>
           <p:cNvSpPr>
             <a:spLocks noGrp="1"/>
           </p:cNvSpPr>
           <p:nvPr>
             <p:ph type="title"/>
-          </p:nvPr>
-        </p:nvSpPr>
-        <p:spPr/>
-        <p:txBody>
-          <a:bodyPr/>
-          <a:lstStyle>
-            <a:lvl1pPr>
-              <a:defRPr/>
-            </a:lvl1pPr>
-          </a:lstStyle>
-          <a:p>
-            <a:r>
-              <a:rPr lang="en-US" smtClean="0"/>
-              <a:t>Click to edit Master title style</a:t>
-            </a:r>
-            <a:endParaRPr lang="en-US"/>
-          </a:p>
-        </p:txBody>
-      </p:sp>
-      <p:sp>
-        <p:nvSpPr>
-          <p:cNvPr id="3" name="Text Placeholder 2"/>
-          <p:cNvSpPr>
-            <a:spLocks noGrp="1"/>
-          </p:cNvSpPr>
-          <p:nvPr>
-            <p:ph type="body" idx="1"/>
           </p:nvPr>
         </p:nvSpPr>
         <p:spPr>
           <a:xfrm>
-            <a:off x="457200" y="1535113"/>
-            <a:ext cx="4040188" cy="639762"/>
+            <a:off x="839788" y="365125"/>
+            <a:ext cx="10515600" cy="1325563"/>
+          </a:xfrm>
+        </p:spPr>
+        <p:txBody>
+          <a:bodyPr/>
+          <a:lstStyle/>
+          <a:p>
+            <a:r>
+              <a:rPr lang="en-US"/>
+              <a:t>Click to edit Master title style</a:t>
+            </a:r>
+          </a:p>
+        </p:txBody>
+      </p:sp>
+      <p:sp>
+        <p:nvSpPr>
+          <p:cNvPr id="3" name="Text Placeholder 2">
+            <a:extLst>
+              <a:ext uri="{FF2B5EF4-FFF2-40B4-BE49-F238E27FC236}">
+                <a16:creationId xmlns:a16="http://schemas.microsoft.com/office/drawing/2014/main" id="{D1697EB4-44C6-4878-8D1B-DA3EE23E8CA6}"/>
+              </a:ext>
+            </a:extLst>
+          </p:cNvPr>
+          <p:cNvSpPr>
+            <a:spLocks noGrp="1"/>
+          </p:cNvSpPr>
+          <p:nvPr>
+            <p:ph type="body" idx="1"/>
+          </p:nvPr>
+        </p:nvSpPr>
+        <p:spPr>
+          <a:xfrm>
+            <a:off x="839788" y="1681163"/>
+            <a:ext cx="5157787" cy="823912"/>
           </a:xfrm>
         </p:spPr>
         <p:txBody>
@@ -1507,15 +1592,21 @@
           <a:p>
             <a:pPr lvl="0"/>
             <a:r>
-              <a:rPr lang="en-US" smtClean="0"/>
-              <a:t>Click to edit Master text styles</a:t>
-            </a:r>
-          </a:p>
-        </p:txBody>
-      </p:sp>
-      <p:sp>
-        <p:nvSpPr>
-          <p:cNvPr id="4" name="Content Placeholder 3"/>
+              <a:rPr lang="en-US"/>
+              <a:t>Edit Master text styles</a:t>
+            </a:r>
+          </a:p>
+        </p:txBody>
+      </p:sp>
+      <p:sp>
+        <p:nvSpPr>
+          <p:cNvPr id="4" name="Content Placeholder 3">
+            <a:extLst>
+              <a:ext uri="{FF2B5EF4-FFF2-40B4-BE49-F238E27FC236}">
+                <a16:creationId xmlns:a16="http://schemas.microsoft.com/office/drawing/2014/main" id="{74115A6C-5605-48FB-A977-50B2B52A4124}"/>
+              </a:ext>
+            </a:extLst>
+          </p:cNvPr>
           <p:cNvSpPr>
             <a:spLocks noGrp="1"/>
           </p:cNvSpPr>
@@ -1525,82 +1616,59 @@
         </p:nvSpPr>
         <p:spPr>
           <a:xfrm>
-            <a:off x="457200" y="2174875"/>
-            <a:ext cx="4040188" cy="3951288"/>
+            <a:off x="839788" y="2505075"/>
+            <a:ext cx="5157787" cy="3684588"/>
           </a:xfrm>
         </p:spPr>
         <p:txBody>
           <a:bodyPr/>
-          <a:lstStyle>
-            <a:lvl1pPr>
-              <a:defRPr sz="2400"/>
-            </a:lvl1pPr>
-            <a:lvl2pPr>
-              <a:defRPr sz="2000"/>
-            </a:lvl2pPr>
-            <a:lvl3pPr>
-              <a:defRPr sz="1800"/>
-            </a:lvl3pPr>
-            <a:lvl4pPr>
-              <a:defRPr sz="1600"/>
-            </a:lvl4pPr>
-            <a:lvl5pPr>
-              <a:defRPr sz="1600"/>
-            </a:lvl5pPr>
-            <a:lvl6pPr>
-              <a:defRPr sz="1600"/>
-            </a:lvl6pPr>
-            <a:lvl7pPr>
-              <a:defRPr sz="1600"/>
-            </a:lvl7pPr>
-            <a:lvl8pPr>
-              <a:defRPr sz="1600"/>
-            </a:lvl8pPr>
-            <a:lvl9pPr>
-              <a:defRPr sz="1600"/>
-            </a:lvl9pPr>
-          </a:lstStyle>
+          <a:lstStyle/>
           <a:p>
             <a:pPr lvl="0"/>
             <a:r>
-              <a:rPr lang="en-US" smtClean="0"/>
-              <a:t>Click to edit Master text styles</a:t>
+              <a:rPr lang="en-US"/>
+              <a:t>Edit Master text styles</a:t>
             </a:r>
           </a:p>
           <a:p>
             <a:pPr lvl="1"/>
             <a:r>
-              <a:rPr lang="en-US" smtClean="0"/>
+              <a:rPr lang="en-US"/>
               <a:t>Second level</a:t>
             </a:r>
           </a:p>
           <a:p>
             <a:pPr lvl="2"/>
             <a:r>
-              <a:rPr lang="en-US" smtClean="0"/>
+              <a:rPr lang="en-US"/>
               <a:t>Third level</a:t>
             </a:r>
           </a:p>
           <a:p>
             <a:pPr lvl="3"/>
             <a:r>
-              <a:rPr lang="en-US" smtClean="0"/>
+              <a:rPr lang="en-US"/>
               <a:t>Fourth level</a:t>
             </a:r>
           </a:p>
           <a:p>
             <a:pPr lvl="4"/>
             <a:r>
-              <a:rPr lang="en-US" smtClean="0"/>
+              <a:rPr lang="en-US"/>
               <a:t>Fifth level</a:t>
             </a:r>
-            <a:endParaRPr lang="en-US"/>
-          </a:p>
-        </p:txBody>
-      </p:sp>
-      <p:sp>
-        <p:nvSpPr>
-          <p:cNvPr id="5" name="Text Placeholder 4"/>
+          </a:p>
+        </p:txBody>
+      </p:sp>
+      <p:sp>
+        <p:nvSpPr>
+          <p:cNvPr id="5" name="Text Placeholder 4">
+            <a:extLst>
+              <a:ext uri="{FF2B5EF4-FFF2-40B4-BE49-F238E27FC236}">
+                <a16:creationId xmlns:a16="http://schemas.microsoft.com/office/drawing/2014/main" id="{9E35799A-3463-4D93-81DA-F1ADC9E32CD7}"/>
+              </a:ext>
+            </a:extLst>
+          </p:cNvPr>
           <p:cNvSpPr>
             <a:spLocks noGrp="1"/>
           </p:cNvSpPr>
@@ -1610,8 +1678,8 @@
         </p:nvSpPr>
         <p:spPr>
           <a:xfrm>
-            <a:off x="4645025" y="1535113"/>
-            <a:ext cx="4041775" cy="639762"/>
+            <a:off x="6172200" y="1681163"/>
+            <a:ext cx="5183188" cy="823912"/>
           </a:xfrm>
         </p:spPr>
         <p:txBody>
@@ -1657,15 +1725,21 @@
           <a:p>
             <a:pPr lvl="0"/>
             <a:r>
-              <a:rPr lang="en-US" smtClean="0"/>
-              <a:t>Click to edit Master text styles</a:t>
-            </a:r>
-          </a:p>
-        </p:txBody>
-      </p:sp>
-      <p:sp>
-        <p:nvSpPr>
-          <p:cNvPr id="6" name="Content Placeholder 5"/>
+              <a:rPr lang="en-US"/>
+              <a:t>Edit Master text styles</a:t>
+            </a:r>
+          </a:p>
+        </p:txBody>
+      </p:sp>
+      <p:sp>
+        <p:nvSpPr>
+          <p:cNvPr id="6" name="Content Placeholder 5">
+            <a:extLst>
+              <a:ext uri="{FF2B5EF4-FFF2-40B4-BE49-F238E27FC236}">
+                <a16:creationId xmlns:a16="http://schemas.microsoft.com/office/drawing/2014/main" id="{22A7B7DB-C128-42F1-A5E0-E6DDEF684847}"/>
+              </a:ext>
+            </a:extLst>
+          </p:cNvPr>
           <p:cNvSpPr>
             <a:spLocks noGrp="1"/>
           </p:cNvSpPr>
@@ -1675,97 +1749,74 @@
         </p:nvSpPr>
         <p:spPr>
           <a:xfrm>
-            <a:off x="4645025" y="2174875"/>
-            <a:ext cx="4041775" cy="3951288"/>
+            <a:off x="6172200" y="2505075"/>
+            <a:ext cx="5183188" cy="3684588"/>
           </a:xfrm>
         </p:spPr>
         <p:txBody>
           <a:bodyPr/>
-          <a:lstStyle>
-            <a:lvl1pPr>
-              <a:defRPr sz="2400"/>
-            </a:lvl1pPr>
-            <a:lvl2pPr>
-              <a:defRPr sz="2000"/>
-            </a:lvl2pPr>
-            <a:lvl3pPr>
-              <a:defRPr sz="1800"/>
-            </a:lvl3pPr>
-            <a:lvl4pPr>
-              <a:defRPr sz="1600"/>
-            </a:lvl4pPr>
-            <a:lvl5pPr>
-              <a:defRPr sz="1600"/>
-            </a:lvl5pPr>
-            <a:lvl6pPr>
-              <a:defRPr sz="1600"/>
-            </a:lvl6pPr>
-            <a:lvl7pPr>
-              <a:defRPr sz="1600"/>
-            </a:lvl7pPr>
-            <a:lvl8pPr>
-              <a:defRPr sz="1600"/>
-            </a:lvl8pPr>
-            <a:lvl9pPr>
-              <a:defRPr sz="1600"/>
-            </a:lvl9pPr>
-          </a:lstStyle>
+          <a:lstStyle/>
           <a:p>
             <a:pPr lvl="0"/>
             <a:r>
+              <a:rPr lang="en-US"/>
+              <a:t>Edit Master text styles</a:t>
+            </a:r>
+          </a:p>
+          <a:p>
+            <a:pPr lvl="1"/>
+            <a:r>
+              <a:rPr lang="en-US"/>
+              <a:t>Second level</a:t>
+            </a:r>
+          </a:p>
+          <a:p>
+            <a:pPr lvl="2"/>
+            <a:r>
+              <a:rPr lang="en-US"/>
+              <a:t>Third level</a:t>
+            </a:r>
+          </a:p>
+          <a:p>
+            <a:pPr lvl="3"/>
+            <a:r>
+              <a:rPr lang="en-US"/>
+              <a:t>Fourth level</a:t>
+            </a:r>
+          </a:p>
+          <a:p>
+            <a:pPr lvl="4"/>
+            <a:r>
+              <a:rPr lang="en-US"/>
+              <a:t>Fifth level</a:t>
+            </a:r>
+          </a:p>
+        </p:txBody>
+      </p:sp>
+      <p:sp>
+        <p:nvSpPr>
+          <p:cNvPr id="7" name="Date Placeholder 6">
+            <a:extLst>
+              <a:ext uri="{FF2B5EF4-FFF2-40B4-BE49-F238E27FC236}">
+                <a16:creationId xmlns:a16="http://schemas.microsoft.com/office/drawing/2014/main" id="{39A25C9C-BE94-4289-9BA1-49E6E5A52DC7}"/>
+              </a:ext>
+            </a:extLst>
+          </p:cNvPr>
+          <p:cNvSpPr>
+            <a:spLocks noGrp="1"/>
+          </p:cNvSpPr>
+          <p:nvPr>
+            <p:ph type="dt" sz="half" idx="10"/>
+          </p:nvPr>
+        </p:nvSpPr>
+        <p:spPr/>
+        <p:txBody>
+          <a:bodyPr/>
+          <a:lstStyle/>
+          <a:p>
+            <a:fld id="{8D2841BB-5308-4CC0-808C-8C8DAAE974C9}" type="datetimeFigureOut">
               <a:rPr lang="en-US" smtClean="0"/>
-              <a:t>Click to edit Master text styles</a:t>
-            </a:r>
-          </a:p>
-          <a:p>
-            <a:pPr lvl="1"/>
-            <a:r>
-              <a:rPr lang="en-US" smtClean="0"/>
-              <a:t>Second level</a:t>
-            </a:r>
-          </a:p>
-          <a:p>
-            <a:pPr lvl="2"/>
-            <a:r>
-              <a:rPr lang="en-US" smtClean="0"/>
-              <a:t>Third level</a:t>
-            </a:r>
-          </a:p>
-          <a:p>
-            <a:pPr lvl="3"/>
-            <a:r>
-              <a:rPr lang="en-US" smtClean="0"/>
-              <a:t>Fourth level</a:t>
-            </a:r>
-          </a:p>
-          <a:p>
-            <a:pPr lvl="4"/>
-            <a:r>
-              <a:rPr lang="en-US" smtClean="0"/>
-              <a:t>Fifth level</a:t>
-            </a:r>
-            <a:endParaRPr lang="en-US"/>
-          </a:p>
-        </p:txBody>
-      </p:sp>
-      <p:sp>
-        <p:nvSpPr>
-          <p:cNvPr id="7" name="Date Placeholder 6"/>
-          <p:cNvSpPr>
-            <a:spLocks noGrp="1"/>
-          </p:cNvSpPr>
-          <p:nvPr>
-            <p:ph type="dt" sz="half" idx="10"/>
-          </p:nvPr>
-        </p:nvSpPr>
-        <p:spPr/>
-        <p:txBody>
-          <a:bodyPr/>
-          <a:lstStyle/>
-          <a:p>
-            <a:fld id="{5BCAD085-E8A6-8845-BD4E-CB4CCA059FC4}" type="datetimeFigureOut">
-              <a:rPr lang="en-US" smtClean="0"/>
-              <a:t>1/27/13</a:t>
+              <a:t>6/9/2018</a:t>
             </a:fld>
             <a:endParaRPr lang="en-US"/>
           </a:p>
@@ -1773,7 +1824,13 @@
       </p:sp>
       <p:sp>
         <p:nvSpPr>
-          <p:cNvPr id="8" name="Footer Placeholder 7"/>
+          <p:cNvPr id="8" name="Footer Placeholder 7">
+            <a:extLst>
+              <a:ext uri="{FF2B5EF4-FFF2-40B4-BE49-F238E27FC236}">
+                <a16:creationId xmlns:a16="http://schemas.microsoft.com/office/drawing/2014/main" id="{33A49E30-33BE-4E25-9216-EF974BEBB783}"/>
+              </a:ext>
+            </a:extLst>
+          </p:cNvPr>
           <p:cNvSpPr>
             <a:spLocks noGrp="1"/>
           </p:cNvSpPr>
@@ -1792,7 +1849,13 @@
       </p:sp>
       <p:sp>
         <p:nvSpPr>
-          <p:cNvPr id="9" name="Slide Number Placeholder 8"/>
+          <p:cNvPr id="9" name="Slide Number Placeholder 8">
+            <a:extLst>
+              <a:ext uri="{FF2B5EF4-FFF2-40B4-BE49-F238E27FC236}">
+                <a16:creationId xmlns:a16="http://schemas.microsoft.com/office/drawing/2014/main" id="{192BB415-51A9-4A25-99E8-6B7483410B18}"/>
+              </a:ext>
+            </a:extLst>
+          </p:cNvPr>
           <p:cNvSpPr>
             <a:spLocks noGrp="1"/>
           </p:cNvSpPr>
@@ -1805,7 +1868,7 @@
           <a:bodyPr/>
           <a:lstStyle/>
           <a:p>
-            <a:fld id="{C1FF6DA9-008F-8B48-92A6-B652298478BF}" type="slidenum">
+            <a:fld id="{FAF9E467-DE96-4CC8-9A85-14AC8D026622}" type="slidenum">
               <a:rPr lang="en-US" smtClean="0"/>
               <a:t>‹#›</a:t>
             </a:fld>
@@ -1816,7 +1879,7 @@
     </p:spTree>
     <p:extLst>
       <p:ext uri="{BB962C8B-B14F-4D97-AF65-F5344CB8AC3E}">
-        <p14:creationId xmlns:p14="http://schemas.microsoft.com/office/powerpoint/2010/main" val="990158736"/>
+        <p14:creationId xmlns:p14="http://schemas.microsoft.com/office/powerpoint/2010/main" val="1669909690"/>
       </p:ext>
     </p:extLst>
   </p:cSld>
@@ -1845,7 +1908,13 @@
       </p:grpSpPr>
       <p:sp>
         <p:nvSpPr>
-          <p:cNvPr id="2" name="Title 1"/>
+          <p:cNvPr id="2" name="Title 1">
+            <a:extLst>
+              <a:ext uri="{FF2B5EF4-FFF2-40B4-BE49-F238E27FC236}">
+                <a16:creationId xmlns:a16="http://schemas.microsoft.com/office/drawing/2014/main" id="{538EF2A3-B958-487B-9164-32EE0E3F4B1E}"/>
+              </a:ext>
+            </a:extLst>
+          </p:cNvPr>
           <p:cNvSpPr>
             <a:spLocks noGrp="1"/>
           </p:cNvSpPr>
@@ -1859,31 +1928,36 @@
           <a:lstStyle/>
           <a:p>
             <a:r>
+              <a:rPr lang="en-US"/>
+              <a:t>Click to edit Master title style</a:t>
+            </a:r>
+          </a:p>
+        </p:txBody>
+      </p:sp>
+      <p:sp>
+        <p:nvSpPr>
+          <p:cNvPr id="3" name="Date Placeholder 2">
+            <a:extLst>
+              <a:ext uri="{FF2B5EF4-FFF2-40B4-BE49-F238E27FC236}">
+                <a16:creationId xmlns:a16="http://schemas.microsoft.com/office/drawing/2014/main" id="{0A6C51EE-65DD-4509-9285-7BB0F877E8C2}"/>
+              </a:ext>
+            </a:extLst>
+          </p:cNvPr>
+          <p:cNvSpPr>
+            <a:spLocks noGrp="1"/>
+          </p:cNvSpPr>
+          <p:nvPr>
+            <p:ph type="dt" sz="half" idx="10"/>
+          </p:nvPr>
+        </p:nvSpPr>
+        <p:spPr/>
+        <p:txBody>
+          <a:bodyPr/>
+          <a:lstStyle/>
+          <a:p>
+            <a:fld id="{8D2841BB-5308-4CC0-808C-8C8DAAE974C9}" type="datetimeFigureOut">
               <a:rPr lang="en-US" smtClean="0"/>
-              <a:t>Click to edit Master title style</a:t>
-            </a:r>
-            <a:endParaRPr lang="en-US"/>
-          </a:p>
-        </p:txBody>
-      </p:sp>
-      <p:sp>
-        <p:nvSpPr>
-          <p:cNvPr id="3" name="Date Placeholder 2"/>
-          <p:cNvSpPr>
-            <a:spLocks noGrp="1"/>
-          </p:cNvSpPr>
-          <p:nvPr>
-            <p:ph type="dt" sz="half" idx="10"/>
-          </p:nvPr>
-        </p:nvSpPr>
-        <p:spPr/>
-        <p:txBody>
-          <a:bodyPr/>
-          <a:lstStyle/>
-          <a:p>
-            <a:fld id="{5BCAD085-E8A6-8845-BD4E-CB4CCA059FC4}" type="datetimeFigureOut">
-              <a:rPr lang="en-US" smtClean="0"/>
-              <a:t>1/27/13</a:t>
+              <a:t>6/9/2018</a:t>
             </a:fld>
             <a:endParaRPr lang="en-US"/>
           </a:p>
@@ -1891,7 +1965,13 @@
       </p:sp>
       <p:sp>
         <p:nvSpPr>
-          <p:cNvPr id="4" name="Footer Placeholder 3"/>
+          <p:cNvPr id="4" name="Footer Placeholder 3">
+            <a:extLst>
+              <a:ext uri="{FF2B5EF4-FFF2-40B4-BE49-F238E27FC236}">
+                <a16:creationId xmlns:a16="http://schemas.microsoft.com/office/drawing/2014/main" id="{D3FE0AB4-2531-494A-861A-763C2F3C7879}"/>
+              </a:ext>
+            </a:extLst>
+          </p:cNvPr>
           <p:cNvSpPr>
             <a:spLocks noGrp="1"/>
           </p:cNvSpPr>
@@ -1910,7 +1990,13 @@
       </p:sp>
       <p:sp>
         <p:nvSpPr>
-          <p:cNvPr id="5" name="Slide Number Placeholder 4"/>
+          <p:cNvPr id="5" name="Slide Number Placeholder 4">
+            <a:extLst>
+              <a:ext uri="{FF2B5EF4-FFF2-40B4-BE49-F238E27FC236}">
+                <a16:creationId xmlns:a16="http://schemas.microsoft.com/office/drawing/2014/main" id="{4989C1C6-A13A-4FDB-ADD6-73E086EB4670}"/>
+              </a:ext>
+            </a:extLst>
+          </p:cNvPr>
           <p:cNvSpPr>
             <a:spLocks noGrp="1"/>
           </p:cNvSpPr>
@@ -1923,7 +2009,7 @@
           <a:bodyPr/>
           <a:lstStyle/>
           <a:p>
-            <a:fld id="{C1FF6DA9-008F-8B48-92A6-B652298478BF}" type="slidenum">
+            <a:fld id="{FAF9E467-DE96-4CC8-9A85-14AC8D026622}" type="slidenum">
               <a:rPr lang="en-US" smtClean="0"/>
               <a:t>‹#›</a:t>
             </a:fld>
@@ -1934,7 +2020,7 @@
     </p:spTree>
     <p:extLst>
       <p:ext uri="{BB962C8B-B14F-4D97-AF65-F5344CB8AC3E}">
-        <p14:creationId xmlns:p14="http://schemas.microsoft.com/office/powerpoint/2010/main" val="727027711"/>
+        <p14:creationId xmlns:p14="http://schemas.microsoft.com/office/powerpoint/2010/main" val="1574142060"/>
       </p:ext>
     </p:extLst>
   </p:cSld>
@@ -1963,7 +2049,13 @@
       </p:grpSpPr>
       <p:sp>
         <p:nvSpPr>
-          <p:cNvPr id="2" name="Date Placeholder 1"/>
+          <p:cNvPr id="2" name="Date Placeholder 1">
+            <a:extLst>
+              <a:ext uri="{FF2B5EF4-FFF2-40B4-BE49-F238E27FC236}">
+                <a16:creationId xmlns:a16="http://schemas.microsoft.com/office/drawing/2014/main" id="{87DBE9CA-E72F-495E-8FC8-73024586D3E5}"/>
+              </a:ext>
+            </a:extLst>
+          </p:cNvPr>
           <p:cNvSpPr>
             <a:spLocks noGrp="1"/>
           </p:cNvSpPr>
@@ -1976,9 +2068,9 @@
           <a:bodyPr/>
           <a:lstStyle/>
           <a:p>
-            <a:fld id="{5BCAD085-E8A6-8845-BD4E-CB4CCA059FC4}" type="datetimeFigureOut">
+            <a:fld id="{8D2841BB-5308-4CC0-808C-8C8DAAE974C9}" type="datetimeFigureOut">
               <a:rPr lang="en-US" smtClean="0"/>
-              <a:t>1/27/13</a:t>
+              <a:t>6/9/2018</a:t>
             </a:fld>
             <a:endParaRPr lang="en-US"/>
           </a:p>
@@ -1986,7 +2078,13 @@
       </p:sp>
       <p:sp>
         <p:nvSpPr>
-          <p:cNvPr id="3" name="Footer Placeholder 2"/>
+          <p:cNvPr id="3" name="Footer Placeholder 2">
+            <a:extLst>
+              <a:ext uri="{FF2B5EF4-FFF2-40B4-BE49-F238E27FC236}">
+                <a16:creationId xmlns:a16="http://schemas.microsoft.com/office/drawing/2014/main" id="{7D1C1A92-D064-4907-A73B-86DF4FE4581A}"/>
+              </a:ext>
+            </a:extLst>
+          </p:cNvPr>
           <p:cNvSpPr>
             <a:spLocks noGrp="1"/>
           </p:cNvSpPr>
@@ -2005,7 +2103,13 @@
       </p:sp>
       <p:sp>
         <p:nvSpPr>
-          <p:cNvPr id="4" name="Slide Number Placeholder 3"/>
+          <p:cNvPr id="4" name="Slide Number Placeholder 3">
+            <a:extLst>
+              <a:ext uri="{FF2B5EF4-FFF2-40B4-BE49-F238E27FC236}">
+                <a16:creationId xmlns:a16="http://schemas.microsoft.com/office/drawing/2014/main" id="{892BE75A-3A6A-489B-82CD-2D9F69C3D293}"/>
+              </a:ext>
+            </a:extLst>
+          </p:cNvPr>
           <p:cNvSpPr>
             <a:spLocks noGrp="1"/>
           </p:cNvSpPr>
@@ -2018,7 +2122,7 @@
           <a:bodyPr/>
           <a:lstStyle/>
           <a:p>
-            <a:fld id="{C1FF6DA9-008F-8B48-92A6-B652298478BF}" type="slidenum">
+            <a:fld id="{FAF9E467-DE96-4CC8-9A85-14AC8D026622}" type="slidenum">
               <a:rPr lang="en-US" smtClean="0"/>
               <a:t>‹#›</a:t>
             </a:fld>
@@ -2029,7 +2133,7 @@
     </p:spTree>
     <p:extLst>
       <p:ext uri="{BB962C8B-B14F-4D97-AF65-F5344CB8AC3E}">
-        <p14:creationId xmlns:p14="http://schemas.microsoft.com/office/powerpoint/2010/main" val="1212999818"/>
+        <p14:creationId xmlns:p14="http://schemas.microsoft.com/office/powerpoint/2010/main" val="2103989069"/>
       </p:ext>
     </p:extLst>
   </p:cSld>
@@ -2058,7 +2162,13 @@
       </p:grpSpPr>
       <p:sp>
         <p:nvSpPr>
-          <p:cNvPr id="2" name="Title 1"/>
+          <p:cNvPr id="2" name="Title 1">
+            <a:extLst>
+              <a:ext uri="{FF2B5EF4-FFF2-40B4-BE49-F238E27FC236}">
+                <a16:creationId xmlns:a16="http://schemas.microsoft.com/office/drawing/2014/main" id="{DD09864D-916A-406D-A2D7-C1E4FD1E7EF6}"/>
+              </a:ext>
+            </a:extLst>
+          </p:cNvPr>
           <p:cNvSpPr>
             <a:spLocks noGrp="1"/>
           </p:cNvSpPr>
@@ -2068,29 +2178,34 @@
         </p:nvSpPr>
         <p:spPr>
           <a:xfrm>
-            <a:off x="457200" y="273050"/>
-            <a:ext cx="3008313" cy="1162050"/>
+            <a:off x="839788" y="457200"/>
+            <a:ext cx="3932237" cy="1600200"/>
           </a:xfrm>
         </p:spPr>
         <p:txBody>
           <a:bodyPr anchor="b"/>
           <a:lstStyle>
-            <a:lvl1pPr algn="l">
-              <a:defRPr sz="2000" b="1"/>
+            <a:lvl1pPr>
+              <a:defRPr sz="3200"/>
             </a:lvl1pPr>
           </a:lstStyle>
           <a:p>
             <a:r>
-              <a:rPr lang="en-US" smtClean="0"/>
+              <a:rPr lang="en-US"/>
               <a:t>Click to edit Master title style</a:t>
             </a:r>
-            <a:endParaRPr lang="en-US"/>
-          </a:p>
-        </p:txBody>
-      </p:sp>
-      <p:sp>
-        <p:nvSpPr>
-          <p:cNvPr id="3" name="Content Placeholder 2"/>
+          </a:p>
+        </p:txBody>
+      </p:sp>
+      <p:sp>
+        <p:nvSpPr>
+          <p:cNvPr id="3" name="Content Placeholder 2">
+            <a:extLst>
+              <a:ext uri="{FF2B5EF4-FFF2-40B4-BE49-F238E27FC236}">
+                <a16:creationId xmlns:a16="http://schemas.microsoft.com/office/drawing/2014/main" id="{5FC0ACE2-EFCF-41DE-B8B5-D4A177F0A92F}"/>
+              </a:ext>
+            </a:extLst>
+          </p:cNvPr>
           <p:cNvSpPr>
             <a:spLocks noGrp="1"/>
           </p:cNvSpPr>
@@ -2100,8 +2215,8 @@
         </p:nvSpPr>
         <p:spPr>
           <a:xfrm>
-            <a:off x="3575050" y="273050"/>
-            <a:ext cx="5111750" cy="5853113"/>
+            <a:off x="5183188" y="987425"/>
+            <a:ext cx="6172200" cy="4873625"/>
           </a:xfrm>
         </p:spPr>
         <p:txBody>
@@ -2138,44 +2253,49 @@
           <a:p>
             <a:pPr lvl="0"/>
             <a:r>
-              <a:rPr lang="en-US" smtClean="0"/>
-              <a:t>Click to edit Master text styles</a:t>
+              <a:rPr lang="en-US"/>
+              <a:t>Edit Master text styles</a:t>
             </a:r>
           </a:p>
           <a:p>
             <a:pPr lvl="1"/>
             <a:r>
-              <a:rPr lang="en-US" smtClean="0"/>
+              <a:rPr lang="en-US"/>
               <a:t>Second level</a:t>
             </a:r>
           </a:p>
           <a:p>
             <a:pPr lvl="2"/>
             <a:r>
-              <a:rPr lang="en-US" smtClean="0"/>
+              <a:rPr lang="en-US"/>
               <a:t>Third level</a:t>
             </a:r>
           </a:p>
           <a:p>
             <a:pPr lvl="3"/>
             <a:r>
-              <a:rPr lang="en-US" smtClean="0"/>
+              <a:rPr lang="en-US"/>
               <a:t>Fourth level</a:t>
             </a:r>
           </a:p>
           <a:p>
             <a:pPr lvl="4"/>
             <a:r>
-              <a:rPr lang="en-US" smtClean="0"/>
+              <a:rPr lang="en-US"/>
               <a:t>Fifth level</a:t>
             </a:r>
-            <a:endParaRPr lang="en-US"/>
-          </a:p>
-        </p:txBody>
-      </p:sp>
-      <p:sp>
-        <p:nvSpPr>
-          <p:cNvPr id="4" name="Text Placeholder 3"/>
+          </a:p>
+        </p:txBody>
+      </p:sp>
+      <p:sp>
+        <p:nvSpPr>
+          <p:cNvPr id="4" name="Text Placeholder 3">
+            <a:extLst>
+              <a:ext uri="{FF2B5EF4-FFF2-40B4-BE49-F238E27FC236}">
+                <a16:creationId xmlns:a16="http://schemas.microsoft.com/office/drawing/2014/main" id="{36FBAE6D-AFA2-4B5C-9DF4-8EB4BA6285A9}"/>
+              </a:ext>
+            </a:extLst>
+          </p:cNvPr>
           <p:cNvSpPr>
             <a:spLocks noGrp="1"/>
           </p:cNvSpPr>
@@ -2185,8 +2305,8 @@
         </p:nvSpPr>
         <p:spPr>
           <a:xfrm>
-            <a:off x="457200" y="1435100"/>
-            <a:ext cx="3008313" cy="4691063"/>
+            <a:off x="839788" y="2057400"/>
+            <a:ext cx="3932237" cy="3811588"/>
           </a:xfrm>
         </p:spPr>
         <p:txBody>
@@ -2194,68 +2314,74 @@
           <a:lstStyle>
             <a:lvl1pPr marL="0" indent="0">
               <a:buNone/>
-              <a:defRPr sz="1400"/>
+              <a:defRPr sz="1600"/>
             </a:lvl1pPr>
             <a:lvl2pPr marL="457200" indent="0">
               <a:buNone/>
-              <a:defRPr sz="1200"/>
+              <a:defRPr sz="1400"/>
             </a:lvl2pPr>
             <a:lvl3pPr marL="914400" indent="0">
               <a:buNone/>
-              <a:defRPr sz="1000"/>
+              <a:defRPr sz="1200"/>
             </a:lvl3pPr>
             <a:lvl4pPr marL="1371600" indent="0">
               <a:buNone/>
-              <a:defRPr sz="900"/>
+              <a:defRPr sz="1000"/>
             </a:lvl4pPr>
             <a:lvl5pPr marL="1828800" indent="0">
               <a:buNone/>
-              <a:defRPr sz="900"/>
+              <a:defRPr sz="1000"/>
             </a:lvl5pPr>
             <a:lvl6pPr marL="2286000" indent="0">
               <a:buNone/>
-              <a:defRPr sz="900"/>
+              <a:defRPr sz="1000"/>
             </a:lvl6pPr>
             <a:lvl7pPr marL="2743200" indent="0">
               <a:buNone/>
-              <a:defRPr sz="900"/>
+              <a:defRPr sz="1000"/>
             </a:lvl7pPr>
             <a:lvl8pPr marL="3200400" indent="0">
               <a:buNone/>
-              <a:defRPr sz="900"/>
+              <a:defRPr sz="1000"/>
             </a:lvl8pPr>
             <a:lvl9pPr marL="3657600" indent="0">
               <a:buNone/>
-              <a:defRPr sz="900"/>
+              <a:defRPr sz="1000"/>
             </a:lvl9pPr>
           </a:lstStyle>
           <a:p>
             <a:pPr lvl="0"/>
             <a:r>
+              <a:rPr lang="en-US"/>
+              <a:t>Edit Master text styles</a:t>
+            </a:r>
+          </a:p>
+        </p:txBody>
+      </p:sp>
+      <p:sp>
+        <p:nvSpPr>
+          <p:cNvPr id="5" name="Date Placeholder 4">
+            <a:extLst>
+              <a:ext uri="{FF2B5EF4-FFF2-40B4-BE49-F238E27FC236}">
+                <a16:creationId xmlns:a16="http://schemas.microsoft.com/office/drawing/2014/main" id="{61B27010-64F1-4AD7-902C-30D9A67AC955}"/>
+              </a:ext>
+            </a:extLst>
+          </p:cNvPr>
+          <p:cNvSpPr>
+            <a:spLocks noGrp="1"/>
+          </p:cNvSpPr>
+          <p:nvPr>
+            <p:ph type="dt" sz="half" idx="10"/>
+          </p:nvPr>
+        </p:nvSpPr>
+        <p:spPr/>
+        <p:txBody>
+          <a:bodyPr/>
+          <a:lstStyle/>
+          <a:p>
+            <a:fld id="{8D2841BB-5308-4CC0-808C-8C8DAAE974C9}" type="datetimeFigureOut">
               <a:rPr lang="en-US" smtClean="0"/>
-              <a:t>Click to edit Master text styles</a:t>
-            </a:r>
-          </a:p>
-        </p:txBody>
-      </p:sp>
-      <p:sp>
-        <p:nvSpPr>
-          <p:cNvPr id="5" name="Date Placeholder 4"/>
-          <p:cNvSpPr>
-            <a:spLocks noGrp="1"/>
-          </p:cNvSpPr>
-          <p:nvPr>
-            <p:ph type="dt" sz="half" idx="10"/>
-          </p:nvPr>
-        </p:nvSpPr>
-        <p:spPr/>
-        <p:txBody>
-          <a:bodyPr/>
-          <a:lstStyle/>
-          <a:p>
-            <a:fld id="{5BCAD085-E8A6-8845-BD4E-CB4CCA059FC4}" type="datetimeFigureOut">
-              <a:rPr lang="en-US" smtClean="0"/>
-              <a:t>1/27/13</a:t>
+              <a:t>6/9/2018</a:t>
             </a:fld>
             <a:endParaRPr lang="en-US"/>
           </a:p>
@@ -2263,7 +2389,13 @@
       </p:sp>
       <p:sp>
         <p:nvSpPr>
-          <p:cNvPr id="6" name="Footer Placeholder 5"/>
+          <p:cNvPr id="6" name="Footer Placeholder 5">
+            <a:extLst>
+              <a:ext uri="{FF2B5EF4-FFF2-40B4-BE49-F238E27FC236}">
+                <a16:creationId xmlns:a16="http://schemas.microsoft.com/office/drawing/2014/main" id="{BC225E35-A69B-4C1C-8693-D9006B60DAD7}"/>
+              </a:ext>
+            </a:extLst>
+          </p:cNvPr>
           <p:cNvSpPr>
             <a:spLocks noGrp="1"/>
           </p:cNvSpPr>
@@ -2282,7 +2414,13 @@
       </p:sp>
       <p:sp>
         <p:nvSpPr>
-          <p:cNvPr id="7" name="Slide Number Placeholder 6"/>
+          <p:cNvPr id="7" name="Slide Number Placeholder 6">
+            <a:extLst>
+              <a:ext uri="{FF2B5EF4-FFF2-40B4-BE49-F238E27FC236}">
+                <a16:creationId xmlns:a16="http://schemas.microsoft.com/office/drawing/2014/main" id="{69132E4D-E2B5-4A88-B2BB-5993D65205D4}"/>
+              </a:ext>
+            </a:extLst>
+          </p:cNvPr>
           <p:cNvSpPr>
             <a:spLocks noGrp="1"/>
           </p:cNvSpPr>
@@ -2295,7 +2433,7 @@
           <a:bodyPr/>
           <a:lstStyle/>
           <a:p>
-            <a:fld id="{C1FF6DA9-008F-8B48-92A6-B652298478BF}" type="slidenum">
+            <a:fld id="{FAF9E467-DE96-4CC8-9A85-14AC8D026622}" type="slidenum">
               <a:rPr lang="en-US" smtClean="0"/>
               <a:t>‹#›</a:t>
             </a:fld>
@@ -2306,7 +2444,7 @@
     </p:spTree>
     <p:extLst>
       <p:ext uri="{BB962C8B-B14F-4D97-AF65-F5344CB8AC3E}">
-        <p14:creationId xmlns:p14="http://schemas.microsoft.com/office/powerpoint/2010/main" val="1840726560"/>
+        <p14:creationId xmlns:p14="http://schemas.microsoft.com/office/powerpoint/2010/main" val="1332929336"/>
       </p:ext>
     </p:extLst>
   </p:cSld>
@@ -2335,7 +2473,13 @@
       </p:grpSpPr>
       <p:sp>
         <p:nvSpPr>
-          <p:cNvPr id="2" name="Title 1"/>
+          <p:cNvPr id="2" name="Title 1">
+            <a:extLst>
+              <a:ext uri="{FF2B5EF4-FFF2-40B4-BE49-F238E27FC236}">
+                <a16:creationId xmlns:a16="http://schemas.microsoft.com/office/drawing/2014/main" id="{48875989-9805-40DE-9C64-EB26CF365D9C}"/>
+              </a:ext>
+            </a:extLst>
+          </p:cNvPr>
           <p:cNvSpPr>
             <a:spLocks noGrp="1"/>
           </p:cNvSpPr>
@@ -2345,29 +2489,34 @@
         </p:nvSpPr>
         <p:spPr>
           <a:xfrm>
-            <a:off x="1792288" y="4800600"/>
-            <a:ext cx="5486400" cy="566738"/>
+            <a:off x="839788" y="457200"/>
+            <a:ext cx="3932237" cy="1600200"/>
           </a:xfrm>
         </p:spPr>
         <p:txBody>
           <a:bodyPr anchor="b"/>
           <a:lstStyle>
-            <a:lvl1pPr algn="l">
-              <a:defRPr sz="2000" b="1"/>
+            <a:lvl1pPr>
+              <a:defRPr sz="3200"/>
             </a:lvl1pPr>
           </a:lstStyle>
           <a:p>
             <a:r>
-              <a:rPr lang="en-US" smtClean="0"/>
+              <a:rPr lang="en-US"/>
               <a:t>Click to edit Master title style</a:t>
             </a:r>
-            <a:endParaRPr lang="en-US"/>
-          </a:p>
-        </p:txBody>
-      </p:sp>
-      <p:sp>
-        <p:nvSpPr>
-          <p:cNvPr id="3" name="Picture Placeholder 2"/>
+          </a:p>
+        </p:txBody>
+      </p:sp>
+      <p:sp>
+        <p:nvSpPr>
+          <p:cNvPr id="3" name="Picture Placeholder 2">
+            <a:extLst>
+              <a:ext uri="{FF2B5EF4-FFF2-40B4-BE49-F238E27FC236}">
+                <a16:creationId xmlns:a16="http://schemas.microsoft.com/office/drawing/2014/main" id="{F2512E0A-3571-4D12-AD6B-3DABB4BD251C}"/>
+              </a:ext>
+            </a:extLst>
+          </p:cNvPr>
           <p:cNvSpPr>
             <a:spLocks noGrp="1"/>
           </p:cNvSpPr>
@@ -2377,8 +2526,8 @@
         </p:nvSpPr>
         <p:spPr>
           <a:xfrm>
-            <a:off x="1792288" y="612775"/>
-            <a:ext cx="5486400" cy="4114800"/>
+            <a:off x="5183188" y="987425"/>
+            <a:ext cx="6172200" cy="4873625"/>
           </a:xfrm>
         </p:spPr>
         <p:txBody>
@@ -2428,7 +2577,13 @@
       </p:sp>
       <p:sp>
         <p:nvSpPr>
-          <p:cNvPr id="4" name="Text Placeholder 3"/>
+          <p:cNvPr id="4" name="Text Placeholder 3">
+            <a:extLst>
+              <a:ext uri="{FF2B5EF4-FFF2-40B4-BE49-F238E27FC236}">
+                <a16:creationId xmlns:a16="http://schemas.microsoft.com/office/drawing/2014/main" id="{9D2994F0-5237-45BF-8604-37CCAA31E520}"/>
+              </a:ext>
+            </a:extLst>
+          </p:cNvPr>
           <p:cNvSpPr>
             <a:spLocks noGrp="1"/>
           </p:cNvSpPr>
@@ -2438,8 +2593,8 @@
         </p:nvSpPr>
         <p:spPr>
           <a:xfrm>
-            <a:off x="1792288" y="5367338"/>
-            <a:ext cx="5486400" cy="804862"/>
+            <a:off x="839788" y="2057400"/>
+            <a:ext cx="3932237" cy="3811588"/>
           </a:xfrm>
         </p:spPr>
         <p:txBody>
@@ -2447,68 +2602,74 @@
           <a:lstStyle>
             <a:lvl1pPr marL="0" indent="0">
               <a:buNone/>
-              <a:defRPr sz="1400"/>
+              <a:defRPr sz="1600"/>
             </a:lvl1pPr>
             <a:lvl2pPr marL="457200" indent="0">
               <a:buNone/>
-              <a:defRPr sz="1200"/>
+              <a:defRPr sz="1400"/>
             </a:lvl2pPr>
             <a:lvl3pPr marL="914400" indent="0">
               <a:buNone/>
-              <a:defRPr sz="1000"/>
+              <a:defRPr sz="1200"/>
             </a:lvl3pPr>
             <a:lvl4pPr marL="1371600" indent="0">
               <a:buNone/>
-              <a:defRPr sz="900"/>
+              <a:defRPr sz="1000"/>
             </a:lvl4pPr>
             <a:lvl5pPr marL="1828800" indent="0">
               <a:buNone/>
-              <a:defRPr sz="900"/>
+              <a:defRPr sz="1000"/>
             </a:lvl5pPr>
             <a:lvl6pPr marL="2286000" indent="0">
               <a:buNone/>
-              <a:defRPr sz="900"/>
+              <a:defRPr sz="1000"/>
             </a:lvl6pPr>
             <a:lvl7pPr marL="2743200" indent="0">
               <a:buNone/>
-              <a:defRPr sz="900"/>
+              <a:defRPr sz="1000"/>
             </a:lvl7pPr>
             <a:lvl8pPr marL="3200400" indent="0">
               <a:buNone/>
-              <a:defRPr sz="900"/>
+              <a:defRPr sz="1000"/>
             </a:lvl8pPr>
             <a:lvl9pPr marL="3657600" indent="0">
               <a:buNone/>
-              <a:defRPr sz="900"/>
+              <a:defRPr sz="1000"/>
             </a:lvl9pPr>
           </a:lstStyle>
           <a:p>
             <a:pPr lvl="0"/>
             <a:r>
+              <a:rPr lang="en-US"/>
+              <a:t>Edit Master text styles</a:t>
+            </a:r>
+          </a:p>
+        </p:txBody>
+      </p:sp>
+      <p:sp>
+        <p:nvSpPr>
+          <p:cNvPr id="5" name="Date Placeholder 4">
+            <a:extLst>
+              <a:ext uri="{FF2B5EF4-FFF2-40B4-BE49-F238E27FC236}">
+                <a16:creationId xmlns:a16="http://schemas.microsoft.com/office/drawing/2014/main" id="{F61B96E5-509D-4E1C-BB5A-F213D26DB272}"/>
+              </a:ext>
+            </a:extLst>
+          </p:cNvPr>
+          <p:cNvSpPr>
+            <a:spLocks noGrp="1"/>
+          </p:cNvSpPr>
+          <p:nvPr>
+            <p:ph type="dt" sz="half" idx="10"/>
+          </p:nvPr>
+        </p:nvSpPr>
+        <p:spPr/>
+        <p:txBody>
+          <a:bodyPr/>
+          <a:lstStyle/>
+          <a:p>
+            <a:fld id="{8D2841BB-5308-4CC0-808C-8C8DAAE974C9}" type="datetimeFigureOut">
               <a:rPr lang="en-US" smtClean="0"/>
-              <a:t>Click to edit Master text styles</a:t>
-            </a:r>
-          </a:p>
-        </p:txBody>
-      </p:sp>
-      <p:sp>
-        <p:nvSpPr>
-          <p:cNvPr id="5" name="Date Placeholder 4"/>
-          <p:cNvSpPr>
-            <a:spLocks noGrp="1"/>
-          </p:cNvSpPr>
-          <p:nvPr>
-            <p:ph type="dt" sz="half" idx="10"/>
-          </p:nvPr>
-        </p:nvSpPr>
-        <p:spPr/>
-        <p:txBody>
-          <a:bodyPr/>
-          <a:lstStyle/>
-          <a:p>
-            <a:fld id="{5BCAD085-E8A6-8845-BD4E-CB4CCA059FC4}" type="datetimeFigureOut">
-              <a:rPr lang="en-US" smtClean="0"/>
-              <a:t>1/27/13</a:t>
+              <a:t>6/9/2018</a:t>
             </a:fld>
             <a:endParaRPr lang="en-US"/>
           </a:p>
@@ -2516,7 +2677,13 @@
       </p:sp>
       <p:sp>
         <p:nvSpPr>
-          <p:cNvPr id="6" name="Footer Placeholder 5"/>
+          <p:cNvPr id="6" name="Footer Placeholder 5">
+            <a:extLst>
+              <a:ext uri="{FF2B5EF4-FFF2-40B4-BE49-F238E27FC236}">
+                <a16:creationId xmlns:a16="http://schemas.microsoft.com/office/drawing/2014/main" id="{BCAAC6BF-F35E-41B1-974D-B9BA1ED31B76}"/>
+              </a:ext>
+            </a:extLst>
+          </p:cNvPr>
           <p:cNvSpPr>
             <a:spLocks noGrp="1"/>
           </p:cNvSpPr>
@@ -2535,7 +2702,13 @@
       </p:sp>
       <p:sp>
         <p:nvSpPr>
-          <p:cNvPr id="7" name="Slide Number Placeholder 6"/>
+          <p:cNvPr id="7" name="Slide Number Placeholder 6">
+            <a:extLst>
+              <a:ext uri="{FF2B5EF4-FFF2-40B4-BE49-F238E27FC236}">
+                <a16:creationId xmlns:a16="http://schemas.microsoft.com/office/drawing/2014/main" id="{BE910619-49A1-4992-B8FD-601B2A3D542C}"/>
+              </a:ext>
+            </a:extLst>
+          </p:cNvPr>
           <p:cNvSpPr>
             <a:spLocks noGrp="1"/>
           </p:cNvSpPr>
@@ -2548,7 +2721,7 @@
           <a:bodyPr/>
           <a:lstStyle/>
           <a:p>
-            <a:fld id="{C1FF6DA9-008F-8B48-92A6-B652298478BF}" type="slidenum">
+            <a:fld id="{FAF9E467-DE96-4CC8-9A85-14AC8D026622}" type="slidenum">
               <a:rPr lang="en-US" smtClean="0"/>
               <a:t>‹#›</a:t>
             </a:fld>
@@ -2559,7 +2732,7 @@
     </p:spTree>
     <p:extLst>
       <p:ext uri="{BB962C8B-B14F-4D97-AF65-F5344CB8AC3E}">
-        <p14:creationId xmlns:p14="http://schemas.microsoft.com/office/powerpoint/2010/main" val="3889236939"/>
+        <p14:creationId xmlns:p14="http://schemas.microsoft.com/office/powerpoint/2010/main" val="1361127722"/>
       </p:ext>
     </p:extLst>
   </p:cSld>
@@ -2593,7 +2766,13 @@
       </p:grpSpPr>
       <p:sp>
         <p:nvSpPr>
-          <p:cNvPr id="2" name="Title Placeholder 1"/>
+          <p:cNvPr id="2" name="Title Placeholder 1">
+            <a:extLst>
+              <a:ext uri="{FF2B5EF4-FFF2-40B4-BE49-F238E27FC236}">
+                <a16:creationId xmlns:a16="http://schemas.microsoft.com/office/drawing/2014/main" id="{07A3AED1-0294-4940-AEA5-FAF107CC2E5A}"/>
+              </a:ext>
+            </a:extLst>
+          </p:cNvPr>
           <p:cNvSpPr>
             <a:spLocks noGrp="1"/>
           </p:cNvSpPr>
@@ -2603,8 +2782,8 @@
         </p:nvSpPr>
         <p:spPr>
           <a:xfrm>
-            <a:off x="457200" y="274638"/>
-            <a:ext cx="8229600" cy="1143000"/>
+            <a:off x="838200" y="365125"/>
+            <a:ext cx="10515600" cy="1325563"/>
           </a:xfrm>
           <a:prstGeom prst="rect">
             <a:avLst/>
@@ -2617,16 +2796,21 @@
           <a:lstStyle/>
           <a:p>
             <a:r>
-              <a:rPr lang="en-US" smtClean="0"/>
+              <a:rPr lang="en-US"/>
               <a:t>Click to edit Master title style</a:t>
             </a:r>
-            <a:endParaRPr lang="en-US"/>
-          </a:p>
-        </p:txBody>
-      </p:sp>
-      <p:sp>
-        <p:nvSpPr>
-          <p:cNvPr id="3" name="Text Placeholder 2"/>
+          </a:p>
+        </p:txBody>
+      </p:sp>
+      <p:sp>
+        <p:nvSpPr>
+          <p:cNvPr id="3" name="Text Placeholder 2">
+            <a:extLst>
+              <a:ext uri="{FF2B5EF4-FFF2-40B4-BE49-F238E27FC236}">
+                <a16:creationId xmlns:a16="http://schemas.microsoft.com/office/drawing/2014/main" id="{40859E54-ABA5-4456-A972-AB9D5E1AF8BD}"/>
+              </a:ext>
+            </a:extLst>
+          </p:cNvPr>
           <p:cNvSpPr>
             <a:spLocks noGrp="1"/>
           </p:cNvSpPr>
@@ -2636,8 +2820,8 @@
         </p:nvSpPr>
         <p:spPr>
           <a:xfrm>
-            <a:off x="457200" y="1600200"/>
-            <a:ext cx="8229600" cy="4525963"/>
+            <a:off x="838200" y="1825625"/>
+            <a:ext cx="10515600" cy="4351338"/>
           </a:xfrm>
           <a:prstGeom prst="rect">
             <a:avLst/>
@@ -2651,44 +2835,49 @@
           <a:p>
             <a:pPr lvl="0"/>
             <a:r>
-              <a:rPr lang="en-US" smtClean="0"/>
-              <a:t>Click to edit Master text styles</a:t>
+              <a:rPr lang="en-US"/>
+              <a:t>Edit Master text styles</a:t>
             </a:r>
           </a:p>
           <a:p>
             <a:pPr lvl="1"/>
             <a:r>
-              <a:rPr lang="en-US" smtClean="0"/>
+              <a:rPr lang="en-US"/>
               <a:t>Second level</a:t>
             </a:r>
           </a:p>
           <a:p>
             <a:pPr lvl="2"/>
             <a:r>
-              <a:rPr lang="en-US" smtClean="0"/>
+              <a:rPr lang="en-US"/>
               <a:t>Third level</a:t>
             </a:r>
           </a:p>
           <a:p>
             <a:pPr lvl="3"/>
             <a:r>
-              <a:rPr lang="en-US" smtClean="0"/>
+              <a:rPr lang="en-US"/>
               <a:t>Fourth level</a:t>
             </a:r>
           </a:p>
           <a:p>
             <a:pPr lvl="4"/>
             <a:r>
-              <a:rPr lang="en-US" smtClean="0"/>
+              <a:rPr lang="en-US"/>
               <a:t>Fifth level</a:t>
             </a:r>
-            <a:endParaRPr lang="en-US"/>
-          </a:p>
-        </p:txBody>
-      </p:sp>
-      <p:sp>
-        <p:nvSpPr>
-          <p:cNvPr id="4" name="Date Placeholder 3"/>
+          </a:p>
+        </p:txBody>
+      </p:sp>
+      <p:sp>
+        <p:nvSpPr>
+          <p:cNvPr id="4" name="Date Placeholder 3">
+            <a:extLst>
+              <a:ext uri="{FF2B5EF4-FFF2-40B4-BE49-F238E27FC236}">
+                <a16:creationId xmlns:a16="http://schemas.microsoft.com/office/drawing/2014/main" id="{ECF6778C-F9C9-4298-8536-C8441463CD64}"/>
+              </a:ext>
+            </a:extLst>
+          </p:cNvPr>
           <p:cNvSpPr>
             <a:spLocks noGrp="1"/>
           </p:cNvSpPr>
@@ -2698,8 +2887,8 @@
         </p:nvSpPr>
         <p:spPr>
           <a:xfrm>
-            <a:off x="457200" y="6356350"/>
-            <a:ext cx="2133600" cy="365125"/>
+            <a:off x="838200" y="6356350"/>
+            <a:ext cx="2743200" cy="365125"/>
           </a:xfrm>
           <a:prstGeom prst="rect">
             <a:avLst/>
@@ -2719,9 +2908,9 @@
             </a:lvl1pPr>
           </a:lstStyle>
           <a:p>
-            <a:fld id="{5BCAD085-E8A6-8845-BD4E-CB4CCA059FC4}" type="datetimeFigureOut">
+            <a:fld id="{8D2841BB-5308-4CC0-808C-8C8DAAE974C9}" type="datetimeFigureOut">
               <a:rPr lang="en-US" smtClean="0"/>
-              <a:t>1/27/13</a:t>
+              <a:t>6/9/2018</a:t>
             </a:fld>
             <a:endParaRPr lang="en-US"/>
           </a:p>
@@ -2729,7 +2918,13 @@
       </p:sp>
       <p:sp>
         <p:nvSpPr>
-          <p:cNvPr id="5" name="Footer Placeholder 4"/>
+          <p:cNvPr id="5" name="Footer Placeholder 4">
+            <a:extLst>
+              <a:ext uri="{FF2B5EF4-FFF2-40B4-BE49-F238E27FC236}">
+                <a16:creationId xmlns:a16="http://schemas.microsoft.com/office/drawing/2014/main" id="{CE0DFF97-D2E2-46FD-9B27-E1F5A5F045D5}"/>
+              </a:ext>
+            </a:extLst>
+          </p:cNvPr>
           <p:cNvSpPr>
             <a:spLocks noGrp="1"/>
           </p:cNvSpPr>
@@ -2739,8 +2934,8 @@
         </p:nvSpPr>
         <p:spPr>
           <a:xfrm>
-            <a:off x="3124200" y="6356350"/>
-            <a:ext cx="2895600" cy="365125"/>
+            <a:off x="4038600" y="6356350"/>
+            <a:ext cx="4114800" cy="365125"/>
           </a:xfrm>
           <a:prstGeom prst="rect">
             <a:avLst/>
@@ -2766,7 +2961,13 @@
       </p:sp>
       <p:sp>
         <p:nvSpPr>
-          <p:cNvPr id="6" name="Slide Number Placeholder 5"/>
+          <p:cNvPr id="6" name="Slide Number Placeholder 5">
+            <a:extLst>
+              <a:ext uri="{FF2B5EF4-FFF2-40B4-BE49-F238E27FC236}">
+                <a16:creationId xmlns:a16="http://schemas.microsoft.com/office/drawing/2014/main" id="{37DE482E-BBFD-4D70-8641-4F7C3FDD304E}"/>
+              </a:ext>
+            </a:extLst>
+          </p:cNvPr>
           <p:cNvSpPr>
             <a:spLocks noGrp="1"/>
           </p:cNvSpPr>
@@ -2776,8 +2977,8 @@
         </p:nvSpPr>
         <p:spPr>
           <a:xfrm>
-            <a:off x="6553200" y="6356350"/>
-            <a:ext cx="2133600" cy="365125"/>
+            <a:off x="8610600" y="6356350"/>
+            <a:ext cx="2743200" cy="365125"/>
           </a:xfrm>
           <a:prstGeom prst="rect">
             <a:avLst/>
@@ -2797,7 +2998,7 @@
             </a:lvl1pPr>
           </a:lstStyle>
           <a:p>
-            <a:fld id="{C1FF6DA9-008F-8B48-92A6-B652298478BF}" type="slidenum">
+            <a:fld id="{FAF9E467-DE96-4CC8-9A85-14AC8D026622}" type="slidenum">
               <a:rPr lang="en-US" smtClean="0"/>
               <a:t>‹#›</a:t>
             </a:fld>
@@ -2808,7 +3009,7 @@
     </p:spTree>
     <p:extLst>
       <p:ext uri="{BB962C8B-B14F-4D97-AF65-F5344CB8AC3E}">
-        <p14:creationId xmlns:p14="http://schemas.microsoft.com/office/powerpoint/2010/main" val="2209977519"/>
+        <p14:creationId xmlns:p14="http://schemas.microsoft.com/office/powerpoint/2010/main" val="115526037"/>
       </p:ext>
     </p:extLst>
   </p:cSld>
@@ -2828,7 +3029,10 @@
   </p:sldLayoutIdLst>
   <p:txStyles>
     <p:titleStyle>
-      <a:lvl1pPr algn="ctr" defTabSz="457200" rtl="0" eaLnBrk="1" latinLnBrk="0" hangingPunct="1">
+      <a:lvl1pPr algn="l" defTabSz="914400" rtl="0" eaLnBrk="1" latinLnBrk="0" hangingPunct="1">
+        <a:lnSpc>
+          <a:spcPct val="90000"/>
+        </a:lnSpc>
         <a:spcBef>
           <a:spcPct val="0"/>
         </a:spcBef>
@@ -2844,13 +3048,16 @@
       </a:lvl1pPr>
     </p:titleStyle>
     <p:bodyStyle>
-      <a:lvl1pPr marL="342900" indent="-342900" algn="l" defTabSz="457200" rtl="0" eaLnBrk="1" latinLnBrk="0" hangingPunct="1">
+      <a:lvl1pPr marL="228600" indent="-228600" algn="l" defTabSz="914400" rtl="0" eaLnBrk="1" latinLnBrk="0" hangingPunct="1">
+        <a:lnSpc>
+          <a:spcPct val="90000"/>
+        </a:lnSpc>
         <a:spcBef>
-          <a:spcPct val="20000"/>
+          <a:spcPts val="1000"/>
         </a:spcBef>
-        <a:buFont typeface="Arial"/>
+        <a:buFont typeface="Arial" panose="020B0604020202020204" pitchFamily="34" charset="0"/>
         <a:buChar char="•"/>
-        <a:defRPr sz="3200" kern="1200">
+        <a:defRPr sz="2800" kern="1200">
           <a:solidFill>
             <a:schemeClr val="tx1"/>
           </a:solidFill>
@@ -2859,26 +3066,14 @@
           <a:cs typeface="+mn-cs"/>
         </a:defRPr>
       </a:lvl1pPr>
-      <a:lvl2pPr marL="742950" indent="-285750" algn="l" defTabSz="457200" rtl="0" eaLnBrk="1" latinLnBrk="0" hangingPunct="1">
+      <a:lvl2pPr marL="685800" indent="-228600" algn="l" defTabSz="914400" rtl="0" eaLnBrk="1" latinLnBrk="0" hangingPunct="1">
+        <a:lnSpc>
+          <a:spcPct val="90000"/>
+        </a:lnSpc>
         <a:spcBef>
-          <a:spcPct val="20000"/>
+          <a:spcPts val="500"/>
         </a:spcBef>
-        <a:buFont typeface="Arial"/>
-        <a:buChar char="–"/>
-        <a:defRPr sz="2800" kern="1200">
-          <a:solidFill>
-            <a:schemeClr val="tx1"/>
-          </a:solidFill>
-          <a:latin typeface="+mn-lt"/>
-          <a:ea typeface="+mn-ea"/>
-          <a:cs typeface="+mn-cs"/>
-        </a:defRPr>
-      </a:lvl2pPr>
-      <a:lvl3pPr marL="1143000" indent="-228600" algn="l" defTabSz="457200" rtl="0" eaLnBrk="1" latinLnBrk="0" hangingPunct="1">
-        <a:spcBef>
-          <a:spcPct val="20000"/>
-        </a:spcBef>
-        <a:buFont typeface="Arial"/>
+        <a:buFont typeface="Arial" panose="020B0604020202020204" pitchFamily="34" charset="0"/>
         <a:buChar char="•"/>
         <a:defRPr sz="2400" kern="1200">
           <a:solidFill>
@@ -2888,42 +3083,15 @@
           <a:ea typeface="+mn-ea"/>
           <a:cs typeface="+mn-cs"/>
         </a:defRPr>
-      </a:lvl3pPr>
-      <a:lvl4pPr marL="1600200" indent="-228600" algn="l" defTabSz="457200" rtl="0" eaLnBrk="1" latinLnBrk="0" hangingPunct="1">
+      </a:lvl2pPr>
+      <a:lvl3pPr marL="1143000" indent="-228600" algn="l" defTabSz="914400" rtl="0" eaLnBrk="1" latinLnBrk="0" hangingPunct="1">
+        <a:lnSpc>
+          <a:spcPct val="90000"/>
+        </a:lnSpc>
         <a:spcBef>
-          <a:spcPct val="20000"/>
+          <a:spcPts val="500"/>
         </a:spcBef>
-        <a:buFont typeface="Arial"/>
-        <a:buChar char="–"/>
-        <a:defRPr sz="2000" kern="1200">
-          <a:solidFill>
-            <a:schemeClr val="tx1"/>
-          </a:solidFill>
-          <a:latin typeface="+mn-lt"/>
-          <a:ea typeface="+mn-ea"/>
-          <a:cs typeface="+mn-cs"/>
-        </a:defRPr>
-      </a:lvl4pPr>
-      <a:lvl5pPr marL="2057400" indent="-228600" algn="l" defTabSz="457200" rtl="0" eaLnBrk="1" latinLnBrk="0" hangingPunct="1">
-        <a:spcBef>
-          <a:spcPct val="20000"/>
-        </a:spcBef>
-        <a:buFont typeface="Arial"/>
-        <a:buChar char="»"/>
-        <a:defRPr sz="2000" kern="1200">
-          <a:solidFill>
-            <a:schemeClr val="tx1"/>
-          </a:solidFill>
-          <a:latin typeface="+mn-lt"/>
-          <a:ea typeface="+mn-ea"/>
-          <a:cs typeface="+mn-cs"/>
-        </a:defRPr>
-      </a:lvl5pPr>
-      <a:lvl6pPr marL="2514600" indent="-228600" algn="l" defTabSz="457200" rtl="0" eaLnBrk="1" latinLnBrk="0" hangingPunct="1">
-        <a:spcBef>
-          <a:spcPct val="20000"/>
-        </a:spcBef>
-        <a:buFont typeface="Arial"/>
+        <a:buFont typeface="Arial" panose="020B0604020202020204" pitchFamily="34" charset="0"/>
         <a:buChar char="•"/>
         <a:defRPr sz="2000" kern="1200">
           <a:solidFill>
@@ -2933,14 +3101,71 @@
           <a:ea typeface="+mn-ea"/>
           <a:cs typeface="+mn-cs"/>
         </a:defRPr>
+      </a:lvl3pPr>
+      <a:lvl4pPr marL="1600200" indent="-228600" algn="l" defTabSz="914400" rtl="0" eaLnBrk="1" latinLnBrk="0" hangingPunct="1">
+        <a:lnSpc>
+          <a:spcPct val="90000"/>
+        </a:lnSpc>
+        <a:spcBef>
+          <a:spcPts val="500"/>
+        </a:spcBef>
+        <a:buFont typeface="Arial" panose="020B0604020202020204" pitchFamily="34" charset="0"/>
+        <a:buChar char="•"/>
+        <a:defRPr sz="1800" kern="1200">
+          <a:solidFill>
+            <a:schemeClr val="tx1"/>
+          </a:solidFill>
+          <a:latin typeface="+mn-lt"/>
+          <a:ea typeface="+mn-ea"/>
+          <a:cs typeface="+mn-cs"/>
+        </a:defRPr>
+      </a:lvl4pPr>
+      <a:lvl5pPr marL="2057400" indent="-228600" algn="l" defTabSz="914400" rtl="0" eaLnBrk="1" latinLnBrk="0" hangingPunct="1">
+        <a:lnSpc>
+          <a:spcPct val="90000"/>
+        </a:lnSpc>
+        <a:spcBef>
+          <a:spcPts val="500"/>
+        </a:spcBef>
+        <a:buFont typeface="Arial" panose="020B0604020202020204" pitchFamily="34" charset="0"/>
+        <a:buChar char="•"/>
+        <a:defRPr sz="1800" kern="1200">
+          <a:solidFill>
+            <a:schemeClr val="tx1"/>
+          </a:solidFill>
+          <a:latin typeface="+mn-lt"/>
+          <a:ea typeface="+mn-ea"/>
+          <a:cs typeface="+mn-cs"/>
+        </a:defRPr>
+      </a:lvl5pPr>
+      <a:lvl6pPr marL="2514600" indent="-228600" algn="l" defTabSz="914400" rtl="0" eaLnBrk="1" latinLnBrk="0" hangingPunct="1">
+        <a:lnSpc>
+          <a:spcPct val="90000"/>
+        </a:lnSpc>
+        <a:spcBef>
+          <a:spcPts val="500"/>
+        </a:spcBef>
+        <a:buFont typeface="Arial" panose="020B0604020202020204" pitchFamily="34" charset="0"/>
+        <a:buChar char="•"/>
+        <a:defRPr sz="1800" kern="1200">
+          <a:solidFill>
+            <a:schemeClr val="tx1"/>
+          </a:solidFill>
+          <a:latin typeface="+mn-lt"/>
+          <a:ea typeface="+mn-ea"/>
+          <a:cs typeface="+mn-cs"/>
+        </a:defRPr>
       </a:lvl6pPr>
-      <a:lvl7pPr marL="2971800" indent="-228600" algn="l" defTabSz="457200" rtl="0" eaLnBrk="1" latinLnBrk="0" hangingPunct="1">
+      <a:lvl7pPr marL="2971800" indent="-228600" algn="l" defTabSz="914400" rtl="0" eaLnBrk="1" latinLnBrk="0" hangingPunct="1">
+        <a:lnSpc>
+          <a:spcPct val="90000"/>
+        </a:lnSpc>
         <a:spcBef>
-          <a:spcPct val="20000"/>
+          <a:spcPts val="500"/>
         </a:spcBef>
-        <a:buFont typeface="Arial"/>
+        <a:buFont typeface="Arial" panose="020B0604020202020204" pitchFamily="34" charset="0"/>
         <a:buChar char="•"/>
-        <a:defRPr sz="2000" kern="1200">
+        <a:defRPr sz="1800" kern="1200">
           <a:solidFill>
             <a:schemeClr val="tx1"/>
           </a:solidFill>
@@ -2949,13 +3174,16 @@
           <a:cs typeface="+mn-cs"/>
         </a:defRPr>
       </a:lvl7pPr>
-      <a:lvl8pPr marL="3429000" indent="-228600" algn="l" defTabSz="457200" rtl="0" eaLnBrk="1" latinLnBrk="0" hangingPunct="1">
+      <a:lvl8pPr marL="3429000" indent="-228600" algn="l" defTabSz="914400" rtl="0" eaLnBrk="1" latinLnBrk="0" hangingPunct="1">
+        <a:lnSpc>
+          <a:spcPct val="90000"/>
+        </a:lnSpc>
         <a:spcBef>
-          <a:spcPct val="20000"/>
+          <a:spcPts val="500"/>
         </a:spcBef>
-        <a:buFont typeface="Arial"/>
+        <a:buFont typeface="Arial" panose="020B0604020202020204" pitchFamily="34" charset="0"/>
         <a:buChar char="•"/>
-        <a:defRPr sz="2000" kern="1200">
+        <a:defRPr sz="1800" kern="1200">
           <a:solidFill>
             <a:schemeClr val="tx1"/>
           </a:solidFill>
@@ -2964,13 +3192,16 @@
           <a:cs typeface="+mn-cs"/>
         </a:defRPr>
       </a:lvl8pPr>
-      <a:lvl9pPr marL="3886200" indent="-228600" algn="l" defTabSz="457200" rtl="0" eaLnBrk="1" latinLnBrk="0" hangingPunct="1">
+      <a:lvl9pPr marL="3886200" indent="-228600" algn="l" defTabSz="914400" rtl="0" eaLnBrk="1" latinLnBrk="0" hangingPunct="1">
+        <a:lnSpc>
+          <a:spcPct val="90000"/>
+        </a:lnSpc>
         <a:spcBef>
-          <a:spcPct val="20000"/>
+          <a:spcPts val="500"/>
         </a:spcBef>
-        <a:buFont typeface="Arial"/>
+        <a:buFont typeface="Arial" panose="020B0604020202020204" pitchFamily="34" charset="0"/>
         <a:buChar char="•"/>
-        <a:defRPr sz="2000" kern="1200">
+        <a:defRPr sz="1800" kern="1200">
           <a:solidFill>
             <a:schemeClr val="tx1"/>
           </a:solidFill>
@@ -2984,7 +3215,7 @@
       <a:defPPr>
         <a:defRPr lang="en-US"/>
       </a:defPPr>
-      <a:lvl1pPr marL="0" algn="l" defTabSz="457200" rtl="0" eaLnBrk="1" latinLnBrk="0" hangingPunct="1">
+      <a:lvl1pPr marL="0" algn="l" defTabSz="914400" rtl="0" eaLnBrk="1" latinLnBrk="0" hangingPunct="1">
         <a:defRPr sz="1800" kern="1200">
           <a:solidFill>
             <a:schemeClr val="tx1"/>
@@ -2994,7 +3225,7 @@
           <a:cs typeface="+mn-cs"/>
         </a:defRPr>
       </a:lvl1pPr>
-      <a:lvl2pPr marL="457200" algn="l" defTabSz="457200" rtl="0" eaLnBrk="1" latinLnBrk="0" hangingPunct="1">
+      <a:lvl2pPr marL="457200" algn="l" defTabSz="914400" rtl="0" eaLnBrk="1" latinLnBrk="0" hangingPunct="1">
         <a:defRPr sz="1800" kern="1200">
           <a:solidFill>
             <a:schemeClr val="tx1"/>
@@ -3004,7 +3235,7 @@
           <a:cs typeface="+mn-cs"/>
         </a:defRPr>
       </a:lvl2pPr>
-      <a:lvl3pPr marL="914400" algn="l" defTabSz="457200" rtl="0" eaLnBrk="1" latinLnBrk="0" hangingPunct="1">
+      <a:lvl3pPr marL="914400" algn="l" defTabSz="914400" rtl="0" eaLnBrk="1" latinLnBrk="0" hangingPunct="1">
         <a:defRPr sz="1800" kern="1200">
           <a:solidFill>
             <a:schemeClr val="tx1"/>
@@ -3014,7 +3245,7 @@
           <a:cs typeface="+mn-cs"/>
         </a:defRPr>
       </a:lvl3pPr>
-      <a:lvl4pPr marL="1371600" algn="l" defTabSz="457200" rtl="0" eaLnBrk="1" latinLnBrk="0" hangingPunct="1">
+      <a:lvl4pPr marL="1371600" algn="l" defTabSz="914400" rtl="0" eaLnBrk="1" latinLnBrk="0" hangingPunct="1">
         <a:defRPr sz="1800" kern="1200">
           <a:solidFill>
             <a:schemeClr val="tx1"/>
@@ -3024,7 +3255,7 @@
           <a:cs typeface="+mn-cs"/>
         </a:defRPr>
       </a:lvl4pPr>
-      <a:lvl5pPr marL="1828800" algn="l" defTabSz="457200" rtl="0" eaLnBrk="1" latinLnBrk="0" hangingPunct="1">
+      <a:lvl5pPr marL="1828800" algn="l" defTabSz="914400" rtl="0" eaLnBrk="1" latinLnBrk="0" hangingPunct="1">
         <a:defRPr sz="1800" kern="1200">
           <a:solidFill>
             <a:schemeClr val="tx1"/>
@@ -3034,7 +3265,7 @@
           <a:cs typeface="+mn-cs"/>
         </a:defRPr>
       </a:lvl5pPr>
-      <a:lvl6pPr marL="2286000" algn="l" defTabSz="457200" rtl="0" eaLnBrk="1" latinLnBrk="0" hangingPunct="1">
+      <a:lvl6pPr marL="2286000" algn="l" defTabSz="914400" rtl="0" eaLnBrk="1" latinLnBrk="0" hangingPunct="1">
         <a:defRPr sz="1800" kern="1200">
           <a:solidFill>
             <a:schemeClr val="tx1"/>
@@ -3044,7 +3275,7 @@
           <a:cs typeface="+mn-cs"/>
         </a:defRPr>
       </a:lvl6pPr>
-      <a:lvl7pPr marL="2743200" algn="l" defTabSz="457200" rtl="0" eaLnBrk="1" latinLnBrk="0" hangingPunct="1">
+      <a:lvl7pPr marL="2743200" algn="l" defTabSz="914400" rtl="0" eaLnBrk="1" latinLnBrk="0" hangingPunct="1">
         <a:defRPr sz="1800" kern="1200">
           <a:solidFill>
             <a:schemeClr val="tx1"/>
@@ -3054,7 +3285,7 @@
           <a:cs typeface="+mn-cs"/>
         </a:defRPr>
       </a:lvl7pPr>
-      <a:lvl8pPr marL="3200400" algn="l" defTabSz="457200" rtl="0" eaLnBrk="1" latinLnBrk="0" hangingPunct="1">
+      <a:lvl8pPr marL="3200400" algn="l" defTabSz="914400" rtl="0" eaLnBrk="1" latinLnBrk="0" hangingPunct="1">
         <a:defRPr sz="1800" kern="1200">
           <a:solidFill>
             <a:schemeClr val="tx1"/>
@@ -3064,7 +3295,7 @@
           <a:cs typeface="+mn-cs"/>
         </a:defRPr>
       </a:lvl8pPr>
-      <a:lvl9pPr marL="3657600" algn="l" defTabSz="457200" rtl="0" eaLnBrk="1" latinLnBrk="0" hangingPunct="1">
+      <a:lvl9pPr marL="3657600" algn="l" defTabSz="914400" rtl="0" eaLnBrk="1" latinLnBrk="0" hangingPunct="1">
         <a:defRPr sz="1800" kern="1200">
           <a:solidFill>
             <a:schemeClr val="tx1"/>
@@ -3089,9 +3320,43 @@
         <p:nvPr/>
       </p:nvGrpSpPr>
       <p:grpSpPr/>
+      <p:sp>
+        <p:nvSpPr>
+          <p:cNvPr id="2" name="Title 1"/>
+          <p:cNvSpPr>
+            <a:spLocks noGrp="1"/>
+          </p:cNvSpPr>
+          <p:nvPr>
+            <p:ph type="title"/>
+          </p:nvPr>
+        </p:nvSpPr>
+        <p:spPr/>
+        <p:txBody>
+          <a:bodyPr/>
+          <a:lstStyle/>
+          <a:p/>
+        </p:txBody>
+      </p:sp>
+      <p:sp>
+        <p:nvSpPr>
+          <p:cNvPr id="3" name="Content Placeholder 2"/>
+          <p:cNvSpPr>
+            <a:spLocks noGrp="1"/>
+          </p:cNvSpPr>
+          <p:nvPr>
+            <p:ph type="obj" idx="1"/>
+          </p:nvPr>
+        </p:nvSpPr>
+        <p:spPr/>
+        <p:txBody>
+          <a:bodyPr/>
+          <a:lstStyle/>
+          <a:p/>
+        </p:txBody>
+      </p:sp>
       <p:pic>
         <p:nvPicPr>
-          <p:cNvPr id="2" name="Picture 1" descr="image1.jpg"/>
+          <p:cNvPr id="4" name="Picture 3" descr="image1.jpg"/>
           <p:cNvPicPr>
             <a:picLocks noChangeAspect="1"/>
           </p:cNvPicPr>
@@ -3105,8 +3370,8 @@
         </p:blipFill>
         <p:spPr>
           <a:xfrm>
-            <a:off x="4081124" y="321182"/>
-            <a:ext cx="2829709" cy="2740349"/>
+            <a:off x="4081150" y="321137"/>
+            <a:ext cx="2829702" cy="2740365"/>
           </a:xfrm>
           <a:prstGeom prst="rect">
             <a:avLst/>
@@ -3115,7 +3380,7 @@
       </p:pic>
       <p:pic>
         <p:nvPicPr>
-          <p:cNvPr id="3" name="Picture 2" descr="image2.jpg"/>
+          <p:cNvPr id="5" name="Picture 4" descr="image2.jpg"/>
           <p:cNvPicPr>
             <a:picLocks noChangeAspect="1"/>
           </p:cNvPicPr>
@@ -3123,14 +3388,15 @@
         </p:nvPicPr>
         <p:blipFill>
           <a:blip r:embed="rId3"/>
+          <a:srcRect b="8148"/>
           <a:stretch>
             <a:fillRect/>
           </a:stretch>
         </p:blipFill>
         <p:spPr>
           <a:xfrm>
-            <a:off x="503280" y="3796470"/>
-            <a:ext cx="3350938" cy="2815094"/>
+            <a:off x="503285" y="3796497"/>
+            <a:ext cx="3350910" cy="2815071"/>
           </a:xfrm>
           <a:prstGeom prst="rect">
             <a:avLst/>
@@ -3139,7 +3405,7 @@
       </p:pic>
       <p:pic>
         <p:nvPicPr>
-          <p:cNvPr id="4" name="Picture 3" descr="image3.jpg"/>
+          <p:cNvPr id="6" name="Picture 5" descr="image3.jpg"/>
           <p:cNvPicPr>
             <a:picLocks noChangeAspect="1"/>
           </p:cNvPicPr>
@@ -3153,8 +3419,8 @@
         </p:blipFill>
         <p:spPr>
           <a:xfrm>
-            <a:off x="7483812" y="3393058"/>
-            <a:ext cx="2005279" cy="3218506"/>
+            <a:off x="7483815" y="3393064"/>
+            <a:ext cx="2005279" cy="3218505"/>
           </a:xfrm>
           <a:prstGeom prst="rect">
             <a:avLst/>
@@ -3163,7 +3429,7 @@
       </p:pic>
       <p:pic>
         <p:nvPicPr>
-          <p:cNvPr id="5" name="Picture 4" descr="image4.jpg"/>
+          <p:cNvPr id="7" name="Picture 6" descr="image4.jpg"/>
           <p:cNvPicPr>
             <a:picLocks noChangeAspect="1"/>
           </p:cNvPicPr>
@@ -3177,8 +3443,8 @@
         </p:blipFill>
         <p:spPr>
           <a:xfrm>
-            <a:off x="9992075" y="3373009"/>
-            <a:ext cx="1906699" cy="3238555"/>
+            <a:off x="9992106" y="3373038"/>
+            <a:ext cx="1906706" cy="3238530"/>
           </a:xfrm>
           <a:prstGeom prst="rect">
             <a:avLst/>
@@ -3187,7 +3453,7 @@
       </p:pic>
       <p:pic>
         <p:nvPicPr>
-          <p:cNvPr id="6" name="Picture 5" descr="image1.jpg"/>
+          <p:cNvPr id="8" name="Picture 7" descr="image1.jpg"/>
           <p:cNvPicPr>
             <a:picLocks noChangeAspect="1"/>
           </p:cNvPicPr>
@@ -3201,8 +3467,8 @@
         </p:blipFill>
         <p:spPr>
           <a:xfrm>
-            <a:off x="678436" y="321182"/>
-            <a:ext cx="2829709" cy="2740349"/>
+            <a:off x="678393" y="321137"/>
+            <a:ext cx="2829702" cy="2740365"/>
           </a:xfrm>
           <a:prstGeom prst="rect">
             <a:avLst/>
@@ -3211,7 +3477,7 @@
       </p:pic>
       <p:pic>
         <p:nvPicPr>
-          <p:cNvPr id="7" name="Picture 6" descr="image5.png"/>
+          <p:cNvPr id="9" name="Picture 8" descr="image5.png"/>
           <p:cNvPicPr>
             <a:picLocks noChangeAspect="1"/>
           </p:cNvPicPr>
@@ -3225,8 +3491,8 @@
         </p:blipFill>
         <p:spPr>
           <a:xfrm>
-            <a:off x="7483812" y="227875"/>
-            <a:ext cx="3391522" cy="2740350"/>
+            <a:off x="7483815" y="227868"/>
+            <a:ext cx="3391509" cy="2740365"/>
           </a:xfrm>
           <a:prstGeom prst="rect">
             <a:avLst/>
@@ -3235,7 +3501,7 @@
       </p:pic>
       <p:pic>
         <p:nvPicPr>
-          <p:cNvPr id="8" name="Picture 7" descr="image6.jpg"/>
+          <p:cNvPr id="10" name="Picture 9" descr="image6.jpg"/>
           <p:cNvPicPr>
             <a:picLocks noChangeAspect="1"/>
           </p:cNvPicPr>
@@ -3243,14 +3509,15 @@
         </p:nvPicPr>
         <p:blipFill>
           <a:blip r:embed="rId8"/>
+          <a:srcRect b="6314"/>
           <a:stretch>
             <a:fillRect/>
           </a:stretch>
         </p:blipFill>
         <p:spPr>
           <a:xfrm>
-            <a:off x="4161281" y="4050563"/>
-            <a:ext cx="2749552" cy="2630155"/>
+            <a:off x="4161251" y="4050517"/>
+            <a:ext cx="2749509" cy="2630180"/>
           </a:xfrm>
           <a:prstGeom prst="rect">
             <a:avLst/>
@@ -3275,9 +3542,123 @@
         <p:nvPr/>
       </p:nvGrpSpPr>
       <p:grpSpPr/>
+      <p:sp>
+        <p:nvSpPr>
+          <p:cNvPr id="2" name="Title 1"/>
+          <p:cNvSpPr>
+            <a:spLocks noGrp="1"/>
+          </p:cNvSpPr>
+          <p:nvPr>
+            <p:ph type="title"/>
+          </p:nvPr>
+        </p:nvSpPr>
+        <p:spPr/>
+        <p:txBody>
+          <a:bodyPr/>
+          <a:lstStyle/>
+          <a:p/>
+        </p:txBody>
+      </p:sp>
+      <p:sp>
+        <p:nvSpPr>
+          <p:cNvPr id="3" name="Content Placeholder 2"/>
+          <p:cNvSpPr>
+            <a:spLocks noGrp="1"/>
+          </p:cNvSpPr>
+          <p:nvPr>
+            <p:ph type="obj" idx="1"/>
+          </p:nvPr>
+        </p:nvSpPr>
+        <p:spPr/>
+        <p:txBody>
+          <a:bodyPr/>
+          <a:lstStyle/>
+          <a:p/>
+        </p:txBody>
+      </p:sp>
+      <p:sp>
+        <p:nvSpPr>
+          <p:cNvPr id="4" name="Rounded Rectangle 3"/>
+          <p:cNvSpPr/>
+          <p:nvPr/>
+        </p:nvSpPr>
+        <p:spPr>
+          <a:xfrm>
+            <a:off x="5530474" y="2255641"/>
+            <a:ext cx="2323307" cy="2074499"/>
+          </a:xfrm>
+          <a:prstGeom prst="roundRect">
+            <a:avLst/>
+          </a:prstGeom>
+          <a:noFill/>
+        </p:spPr>
+        <p:style>
+          <a:lnRef idx="2">
+            <a:schemeClr val="accent1">
+              <a:shade val="50000"/>
+            </a:schemeClr>
+          </a:lnRef>
+          <a:fillRef idx="1">
+            <a:schemeClr val="accent1"/>
+          </a:fillRef>
+          <a:effectRef idx="0">
+            <a:schemeClr val="accent1"/>
+          </a:effectRef>
+          <a:fontRef idx="minor">
+            <a:schemeClr val="lt1"/>
+          </a:fontRef>
+        </p:style>
+        <p:txBody>
+          <a:bodyPr rtlCol="0" anchor="ctr"/>
+          <a:lstStyle/>
+          <a:p>
+            <a:pPr algn="ctr"/>
+          </a:p>
+        </p:txBody>
+      </p:sp>
+      <p:sp>
+        <p:nvSpPr>
+          <p:cNvPr id="5" name="Rounded Rectangle 4"/>
+          <p:cNvSpPr/>
+          <p:nvPr/>
+        </p:nvSpPr>
+        <p:spPr>
+          <a:xfrm>
+            <a:off x="8809786" y="329275"/>
+            <a:ext cx="3142701" cy="1926366"/>
+          </a:xfrm>
+          <a:prstGeom prst="roundRect">
+            <a:avLst/>
+          </a:prstGeom>
+          <a:noFill/>
+        </p:spPr>
+        <p:style>
+          <a:lnRef idx="2">
+            <a:schemeClr val="accent1">
+              <a:shade val="50000"/>
+            </a:schemeClr>
+          </a:lnRef>
+          <a:fillRef idx="1">
+            <a:schemeClr val="accent1"/>
+          </a:fillRef>
+          <a:effectRef idx="0">
+            <a:schemeClr val="accent1"/>
+          </a:effectRef>
+          <a:fontRef idx="minor">
+            <a:schemeClr val="lt1"/>
+          </a:fontRef>
+        </p:style>
+        <p:txBody>
+          <a:bodyPr rtlCol="0" anchor="ctr"/>
+          <a:lstStyle/>
+          <a:p>
+            <a:pPr algn="ctr"/>
+          </a:p>
+        </p:txBody>
+      </p:sp>
       <p:pic>
         <p:nvPicPr>
-          <p:cNvPr id="2" name="Picture 1" descr="image7.png"/>
+          <p:cNvPr id="6" name="Picture 5" descr="image7.png"/>
           <p:cNvPicPr>
             <a:picLocks noChangeAspect="1"/>
           </p:cNvPicPr>
@@ -3291,8 +3672,8 @@
         </p:blipFill>
         <p:spPr>
           <a:xfrm>
-            <a:off x="414917" y="329293"/>
-            <a:ext cx="2957958" cy="2957958"/>
+            <a:off x="414954" y="329275"/>
+            <a:ext cx="2957992" cy="2957992"/>
           </a:xfrm>
           <a:prstGeom prst="rect">
             <a:avLst/>
@@ -3301,7 +3682,7 @@
       </p:pic>
       <p:pic>
         <p:nvPicPr>
-          <p:cNvPr id="3" name="Picture 2" descr="image8.jpg"/>
+          <p:cNvPr id="7" name="Picture 6" descr="image8.jpg"/>
           <p:cNvPicPr>
             <a:picLocks noChangeAspect="1"/>
           </p:cNvPicPr>
@@ -3309,14 +3690,15 @@
         </p:nvPicPr>
         <p:blipFill>
           <a:blip r:embed="rId3"/>
+          <a:srcRect r="10577"/>
           <a:stretch>
             <a:fillRect/>
           </a:stretch>
         </p:blipFill>
         <p:spPr>
           <a:xfrm>
-            <a:off x="7472206" y="4476589"/>
-            <a:ext cx="2216995" cy="2545826"/>
+            <a:off x="7472202" y="4476628"/>
+            <a:ext cx="2216962" cy="2545781"/>
           </a:xfrm>
           <a:prstGeom prst="rect">
             <a:avLst/>
@@ -3325,7 +3707,7 @@
       </p:pic>
       <p:pic>
         <p:nvPicPr>
-          <p:cNvPr id="4" name="Picture 3" descr="image9.gif"/>
+          <p:cNvPr id="8" name="Picture 7" descr="image9.gif"/>
           <p:cNvPicPr>
             <a:picLocks noChangeAspect="1"/>
           </p:cNvPicPr>
@@ -3333,60 +3715,24 @@
         </p:nvPicPr>
         <p:blipFill>
           <a:blip r:embed="rId4"/>
+          <a:srcRect t="10343" b="9782"/>
           <a:stretch>
             <a:fillRect/>
           </a:stretch>
         </p:blipFill>
         <p:spPr>
           <a:xfrm>
-            <a:off x="5036619" y="452927"/>
-            <a:ext cx="3337175" cy="4000873"/>
+            <a:off x="4978085" y="329275"/>
+            <a:ext cx="3337194" cy="4000865"/>
           </a:xfrm>
           <a:prstGeom prst="rect">
             <a:avLst/>
           </a:prstGeom>
         </p:spPr>
       </p:pic>
-      <p:sp>
-        <p:nvSpPr>
-          <p:cNvPr id="5" name="Rounded Rectangle 4"/>
-          <p:cNvSpPr/>
-          <p:nvPr/>
-        </p:nvSpPr>
-        <p:spPr>
-          <a:xfrm>
-            <a:off x="5589036" y="2379306"/>
-            <a:ext cx="2323323" cy="2074494"/>
-          </a:xfrm>
-          <a:prstGeom prst="roundRect">
-            <a:avLst/>
-          </a:prstGeom>
-        </p:spPr>
-        <p:style>
-          <a:lnRef idx="1">
-            <a:schemeClr val="accent1"/>
-          </a:lnRef>
-          <a:fillRef idx="3">
-            <a:schemeClr val="accent1"/>
-          </a:fillRef>
-          <a:effectRef idx="2">
-            <a:schemeClr val="accent1"/>
-          </a:effectRef>
-          <a:fontRef idx="minor">
-            <a:schemeClr val="lt1"/>
-          </a:fontRef>
-        </p:style>
-        <p:txBody>
-          <a:bodyPr rtlCol="0" anchor="ctr"/>
-          <a:lstStyle/>
-          <a:p>
-            <a:pPr algn="ctr"/>
-          </a:p>
-        </p:txBody>
-      </p:sp>
       <p:pic>
         <p:nvPicPr>
-          <p:cNvPr id="6" name="Picture 5" descr="image9.gif"/>
+          <p:cNvPr id="9" name="Picture 8" descr="image9.gif"/>
           <p:cNvPicPr>
             <a:picLocks noChangeAspect="1"/>
           </p:cNvPicPr>
@@ -3394,60 +3740,24 @@
         </p:nvPicPr>
         <p:blipFill>
           <a:blip r:embed="rId5"/>
+          <a:srcRect t="10343" b="9782"/>
           <a:stretch>
             <a:fillRect/>
           </a:stretch>
         </p:blipFill>
         <p:spPr>
           <a:xfrm>
-            <a:off x="8725256" y="452928"/>
-            <a:ext cx="3337175" cy="4000873"/>
+            <a:off x="8715969" y="329275"/>
+            <a:ext cx="3337194" cy="4000865"/>
           </a:xfrm>
           <a:prstGeom prst="rect">
             <a:avLst/>
           </a:prstGeom>
         </p:spPr>
       </p:pic>
-      <p:sp>
-        <p:nvSpPr>
-          <p:cNvPr id="7" name="Rounded Rectangle 6"/>
-          <p:cNvSpPr/>
-          <p:nvPr/>
-        </p:nvSpPr>
-        <p:spPr>
-          <a:xfrm>
-            <a:off x="8819128" y="452927"/>
-            <a:ext cx="3142718" cy="1926380"/>
-          </a:xfrm>
-          <a:prstGeom prst="roundRect">
-            <a:avLst/>
-          </a:prstGeom>
-        </p:spPr>
-        <p:style>
-          <a:lnRef idx="1">
-            <a:schemeClr val="accent1"/>
-          </a:lnRef>
-          <a:fillRef idx="3">
-            <a:schemeClr val="accent1"/>
-          </a:fillRef>
-          <a:effectRef idx="2">
-            <a:schemeClr val="accent1"/>
-          </a:effectRef>
-          <a:fontRef idx="minor">
-            <a:schemeClr val="lt1"/>
-          </a:fontRef>
-        </p:style>
-        <p:txBody>
-          <a:bodyPr rtlCol="0" anchor="ctr"/>
-          <a:lstStyle/>
-          <a:p>
-            <a:pPr algn="ctr"/>
-          </a:p>
-        </p:txBody>
-      </p:sp>
       <p:pic>
         <p:nvPicPr>
-          <p:cNvPr id="8" name="Picture 7" descr="image10.jpg"/>
+          <p:cNvPr id="10" name="Picture 9" descr="image10.jpg"/>
           <p:cNvPicPr>
             <a:picLocks noChangeAspect="1"/>
           </p:cNvPicPr>
@@ -3455,14 +3765,15 @@
         </p:nvPicPr>
         <p:blipFill>
           <a:blip r:embed="rId6"/>
+          <a:srcRect r="50317" b="14066"/>
           <a:stretch>
             <a:fillRect/>
           </a:stretch>
         </p:blipFill>
         <p:spPr>
           <a:xfrm>
-            <a:off x="588117" y="3221937"/>
-            <a:ext cx="3337175" cy="3155449"/>
+            <a:off x="588142" y="3221979"/>
+            <a:ext cx="3337194" cy="3155411"/>
           </a:xfrm>
           <a:prstGeom prst="rect">
             <a:avLst/>
@@ -3488,44 +3799,44 @@
         <a:sysClr val="window" lastClr="FFFFFF"/>
       </a:lt1>
       <a:dk2>
-        <a:srgbClr val="1F497D"/>
+        <a:srgbClr val="44546A"/>
       </a:dk2>
       <a:lt2>
-        <a:srgbClr val="EEECE1"/>
+        <a:srgbClr val="E7E6E6"/>
       </a:lt2>
       <a:accent1>
-        <a:srgbClr val="4F81BD"/>
+        <a:srgbClr val="4472C4"/>
       </a:accent1>
       <a:accent2>
-        <a:srgbClr val="C0504D"/>
+        <a:srgbClr val="ED7D31"/>
       </a:accent2>
       <a:accent3>
-        <a:srgbClr val="9BBB59"/>
+        <a:srgbClr val="A5A5A5"/>
       </a:accent3>
       <a:accent4>
-        <a:srgbClr val="8064A2"/>
+        <a:srgbClr val="FFC000"/>
       </a:accent4>
       <a:accent5>
-        <a:srgbClr val="4BACC6"/>
+        <a:srgbClr val="5B9BD5"/>
       </a:accent5>
       <a:accent6>
-        <a:srgbClr val="F79646"/>
+        <a:srgbClr val="70AD47"/>
       </a:accent6>
       <a:hlink>
-        <a:srgbClr val="0000FF"/>
+        <a:srgbClr val="0563C1"/>
       </a:hlink>
       <a:folHlink>
-        <a:srgbClr val="800080"/>
+        <a:srgbClr val="954F72"/>
       </a:folHlink>
     </a:clrScheme>
     <a:fontScheme name="Office">
       <a:majorFont>
-        <a:latin typeface="Calibri"/>
+        <a:latin typeface="Calibri Light" panose="020F0302020204030204"/>
         <a:ea typeface=""/>
         <a:cs typeface=""/>
-        <a:font script="Jpan" typeface="ＭＳ Ｐゴシック"/>
+        <a:font script="Jpan" typeface="游ゴシック Light"/>
         <a:font script="Hang" typeface="맑은 고딕"/>
-        <a:font script="Hans" typeface="宋体"/>
+        <a:font script="Hans" typeface="等线 Light"/>
         <a:font script="Hant" typeface="新細明體"/>
         <a:font script="Arab" typeface="Times New Roman"/>
         <a:font script="Hebr" typeface="Times New Roman"/>
@@ -3553,14 +3864,31 @@
         <a:font script="Viet" typeface="Times New Roman"/>
         <a:font script="Uigh" typeface="Microsoft Uighur"/>
         <a:font script="Geor" typeface="Sylfaen"/>
+        <a:font script="Armn" typeface="Arial"/>
+        <a:font script="Bugi" typeface="Leelawadee UI"/>
+        <a:font script="Bopo" typeface="Microsoft JhengHei"/>
+        <a:font script="Java" typeface="Javanese Text"/>
+        <a:font script="Lisu" typeface="Segoe UI"/>
+        <a:font script="Mymr" typeface="Myanmar Text"/>
+        <a:font script="Nkoo" typeface="Ebrima"/>
+        <a:font script="Olck" typeface="Nirmala UI"/>
+        <a:font script="Osma" typeface="Ebrima"/>
+        <a:font script="Phag" typeface="Phagspa"/>
+        <a:font script="Syrn" typeface="Estrangelo Edessa"/>
+        <a:font script="Syrj" typeface="Estrangelo Edessa"/>
+        <a:font script="Syre" typeface="Estrangelo Edessa"/>
+        <a:font script="Sora" typeface="Nirmala UI"/>
+        <a:font script="Tale" typeface="Microsoft Tai Le"/>
+        <a:font script="Talu" typeface="Microsoft New Tai Lue"/>
+        <a:font script="Tfng" typeface="Ebrima"/>
       </a:majorFont>
       <a:minorFont>
-        <a:latin typeface="Calibri"/>
+        <a:latin typeface="Calibri" panose="020F0502020204030204"/>
         <a:ea typeface=""/>
         <a:cs typeface=""/>
-        <a:font script="Jpan" typeface="ＭＳ Ｐゴシック"/>
+        <a:font script="Jpan" typeface="游ゴシック"/>
         <a:font script="Hang" typeface="맑은 고딕"/>
-        <a:font script="Hans" typeface="宋体"/>
+        <a:font script="Hans" typeface="等线"/>
         <a:font script="Hant" typeface="新細明體"/>
         <a:font script="Arab" typeface="Arial"/>
         <a:font script="Hebr" typeface="Arial"/>
@@ -3588,6 +3916,23 @@
         <a:font script="Viet" typeface="Arial"/>
         <a:font script="Uigh" typeface="Microsoft Uighur"/>
         <a:font script="Geor" typeface="Sylfaen"/>
+        <a:font script="Armn" typeface="Arial"/>
+        <a:font script="Bugi" typeface="Leelawadee UI"/>
+        <a:font script="Bopo" typeface="Microsoft JhengHei"/>
+        <a:font script="Java" typeface="Javanese Text"/>
+        <a:font script="Lisu" typeface="Segoe UI"/>
+        <a:font script="Mymr" typeface="Myanmar Text"/>
+        <a:font script="Nkoo" typeface="Ebrima"/>
+        <a:font script="Olck" typeface="Nirmala UI"/>
+        <a:font script="Osma" typeface="Ebrima"/>
+        <a:font script="Phag" typeface="Phagspa"/>
+        <a:font script="Syrn" typeface="Estrangelo Edessa"/>
+        <a:font script="Syrj" typeface="Estrangelo Edessa"/>
+        <a:font script="Syre" typeface="Estrangelo Edessa"/>
+        <a:font script="Sora" typeface="Nirmala UI"/>
+        <a:font script="Tale" typeface="Microsoft Tai Le"/>
+        <a:font script="Talu" typeface="Microsoft New Tai Lue"/>
+        <a:font script="Tfng" typeface="Ebrima"/>
       </a:minorFont>
     </a:fontScheme>
     <a:fmtScheme name="Office">
@@ -3599,200 +3944,141 @@
           <a:gsLst>
             <a:gs pos="0">
               <a:schemeClr val="phClr">
-                <a:tint val="50000"/>
-                <a:satMod val="300000"/>
+                <a:lumMod val="110000"/>
+                <a:satMod val="105000"/>
+                <a:tint val="67000"/>
               </a:schemeClr>
             </a:gs>
-            <a:gs pos="35000">
+            <a:gs pos="50000">
               <a:schemeClr val="phClr">
-                <a:tint val="37000"/>
-                <a:satMod val="300000"/>
+                <a:lumMod val="105000"/>
+                <a:satMod val="103000"/>
+                <a:tint val="73000"/>
               </a:schemeClr>
             </a:gs>
             <a:gs pos="100000">
               <a:schemeClr val="phClr">
-                <a:tint val="15000"/>
-                <a:satMod val="350000"/>
+                <a:lumMod val="105000"/>
+                <a:satMod val="109000"/>
+                <a:tint val="81000"/>
               </a:schemeClr>
             </a:gs>
           </a:gsLst>
-          <a:lin ang="16200000" scaled="1"/>
+          <a:lin ang="5400000" scaled="0"/>
         </a:gradFill>
         <a:gradFill rotWithShape="1">
           <a:gsLst>
             <a:gs pos="0">
               <a:schemeClr val="phClr">
-                <a:tint val="100000"/>
+                <a:satMod val="103000"/>
+                <a:lumMod val="102000"/>
+                <a:tint val="94000"/>
+              </a:schemeClr>
+            </a:gs>
+            <a:gs pos="50000">
+              <a:schemeClr val="phClr">
+                <a:satMod val="110000"/>
+                <a:lumMod val="100000"/>
                 <a:shade val="100000"/>
-                <a:satMod val="130000"/>
               </a:schemeClr>
             </a:gs>
             <a:gs pos="100000">
               <a:schemeClr val="phClr">
-                <a:tint val="50000"/>
-                <a:shade val="100000"/>
-                <a:satMod val="350000"/>
+                <a:lumMod val="99000"/>
+                <a:satMod val="120000"/>
+                <a:shade val="78000"/>
               </a:schemeClr>
             </a:gs>
           </a:gsLst>
-          <a:lin ang="16200000" scaled="0"/>
+          <a:lin ang="5400000" scaled="0"/>
         </a:gradFill>
       </a:fillStyleLst>
       <a:lnStyleLst>
-        <a:ln w="9525" cap="flat" cmpd="sng" algn="ctr">
-          <a:solidFill>
-            <a:schemeClr val="phClr">
-              <a:shade val="95000"/>
-              <a:satMod val="105000"/>
-            </a:schemeClr>
-          </a:solidFill>
-          <a:prstDash val="solid"/>
-        </a:ln>
-        <a:ln w="25400" cap="flat" cmpd="sng" algn="ctr">
+        <a:ln w="6350" cap="flat" cmpd="sng" algn="ctr">
           <a:solidFill>
             <a:schemeClr val="phClr"/>
           </a:solidFill>
           <a:prstDash val="solid"/>
+          <a:miter lim="800000"/>
         </a:ln>
-        <a:ln w="38100" cap="flat" cmpd="sng" algn="ctr">
+        <a:ln w="12700" cap="flat" cmpd="sng" algn="ctr">
           <a:solidFill>
             <a:schemeClr val="phClr"/>
           </a:solidFill>
           <a:prstDash val="solid"/>
+          <a:miter lim="800000"/>
+        </a:ln>
+        <a:ln w="19050" cap="flat" cmpd="sng" algn="ctr">
+          <a:solidFill>
+            <a:schemeClr val="phClr"/>
+          </a:solidFill>
+          <a:prstDash val="solid"/>
+          <a:miter lim="800000"/>
         </a:ln>
       </a:lnStyleLst>
       <a:effectStyleLst>
         <a:effectStyle>
+          <a:effectLst/>
+        </a:effectStyle>
+        <a:effectStyle>
+          <a:effectLst/>
+        </a:effectStyle>
+        <a:effectStyle>
           <a:effectLst>
-            <a:outerShdw blurRad="40000" dist="20000" dir="5400000" rotWithShape="0">
+            <a:outerShdw blurRad="57150" dist="19050" dir="5400000" algn="ctr" rotWithShape="0">
               <a:srgbClr val="000000">
-                <a:alpha val="38000"/>
+                <a:alpha val="63000"/>
               </a:srgbClr>
             </a:outerShdw>
           </a:effectLst>
-        </a:effectStyle>
-        <a:effectStyle>
-          <a:effectLst>
-            <a:outerShdw blurRad="40000" dist="23000" dir="5400000" rotWithShape="0">
-              <a:srgbClr val="000000">
-                <a:alpha val="35000"/>
-              </a:srgbClr>
-            </a:outerShdw>
-          </a:effectLst>
-        </a:effectStyle>
-        <a:effectStyle>
-          <a:effectLst>
-            <a:outerShdw blurRad="40000" dist="23000" dir="5400000" rotWithShape="0">
-              <a:srgbClr val="000000">
-                <a:alpha val="35000"/>
-              </a:srgbClr>
-            </a:outerShdw>
-          </a:effectLst>
-          <a:scene3d>
-            <a:camera prst="orthographicFront">
-              <a:rot lat="0" lon="0" rev="0"/>
-            </a:camera>
-            <a:lightRig rig="threePt" dir="t">
-              <a:rot lat="0" lon="0" rev="1200000"/>
-            </a:lightRig>
-          </a:scene3d>
-          <a:sp3d>
-            <a:bevelT w="63500" h="25400"/>
-          </a:sp3d>
         </a:effectStyle>
       </a:effectStyleLst>
       <a:bgFillStyleLst>
         <a:solidFill>
           <a:schemeClr val="phClr"/>
         </a:solidFill>
+        <a:solidFill>
+          <a:schemeClr val="phClr">
+            <a:tint val="95000"/>
+            <a:satMod val="170000"/>
+          </a:schemeClr>
+        </a:solidFill>
         <a:gradFill rotWithShape="1">
           <a:gsLst>
             <a:gs pos="0">
               <a:schemeClr val="phClr">
-                <a:tint val="40000"/>
-                <a:satMod val="350000"/>
+                <a:tint val="93000"/>
+                <a:satMod val="150000"/>
+                <a:shade val="98000"/>
+                <a:lumMod val="102000"/>
               </a:schemeClr>
             </a:gs>
-            <a:gs pos="40000">
+            <a:gs pos="50000">
               <a:schemeClr val="phClr">
-                <a:tint val="45000"/>
-                <a:shade val="99000"/>
-                <a:satMod val="350000"/>
+                <a:tint val="98000"/>
+                <a:satMod val="130000"/>
+                <a:shade val="90000"/>
+                <a:lumMod val="103000"/>
               </a:schemeClr>
             </a:gs>
             <a:gs pos="100000">
               <a:schemeClr val="phClr">
-                <a:shade val="20000"/>
-                <a:satMod val="255000"/>
+                <a:shade val="63000"/>
+                <a:satMod val="120000"/>
               </a:schemeClr>
             </a:gs>
           </a:gsLst>
-          <a:path path="circle">
-            <a:fillToRect l="50000" t="-80000" r="50000" b="180000"/>
-          </a:path>
-        </a:gradFill>
-        <a:gradFill rotWithShape="1">
-          <a:gsLst>
-            <a:gs pos="0">
-              <a:schemeClr val="phClr">
-                <a:tint val="80000"/>
-                <a:satMod val="300000"/>
-              </a:schemeClr>
-            </a:gs>
-            <a:gs pos="100000">
-              <a:schemeClr val="phClr">
-                <a:shade val="30000"/>
-                <a:satMod val="200000"/>
-              </a:schemeClr>
-            </a:gs>
-          </a:gsLst>
-          <a:path path="circle">
-            <a:fillToRect l="50000" t="50000" r="50000" b="50000"/>
-          </a:path>
+          <a:lin ang="5400000" scaled="0"/>
         </a:gradFill>
       </a:bgFillStyleLst>
     </a:fmtScheme>
   </a:themeElements>
-  <a:objectDefaults>
-    <a:spDef>
-      <a:spPr/>
-      <a:bodyPr/>
-      <a:lstStyle/>
-      <a:style>
-        <a:lnRef idx="1">
-          <a:schemeClr val="accent1"/>
-        </a:lnRef>
-        <a:fillRef idx="3">
-          <a:schemeClr val="accent1"/>
-        </a:fillRef>
-        <a:effectRef idx="2">
-          <a:schemeClr val="accent1"/>
-        </a:effectRef>
-        <a:fontRef idx="minor">
-          <a:schemeClr val="lt1"/>
-        </a:fontRef>
-      </a:style>
-    </a:spDef>
-    <a:lnDef>
-      <a:spPr/>
-      <a:bodyPr/>
-      <a:lstStyle/>
-      <a:style>
-        <a:lnRef idx="2">
-          <a:schemeClr val="accent1"/>
-        </a:lnRef>
-        <a:fillRef idx="0">
-          <a:schemeClr val="accent1"/>
-        </a:fillRef>
-        <a:effectRef idx="1">
-          <a:schemeClr val="accent1"/>
-        </a:effectRef>
-        <a:fontRef idx="minor">
-          <a:schemeClr val="tx1"/>
-        </a:fontRef>
-      </a:style>
-    </a:lnDef>
-  </a:objectDefaults>
+  <a:objectDefaults/>
   <a:extraClrSchemeLst/>
+  <a:extLst>
+    <a:ext uri="{05A4C25C-085E-4340-85A3-A5531E510DB2}">
+      <thm15:themeFamily xmlns:thm15="http://schemas.microsoft.com/office/thememl/2012/main" name="Office Theme" id="{62F939B6-93AF-4DB8-9C6B-D6C7DFDC589F}" vid="{4A3C46E8-61CC-4603-A589-7422A47A8E4A}"/>
+    </a:ext>
+  </a:extLst>
 </a:theme>
 </file>